--- a/docs/meeting/2026_07_08.pptx
+++ b/docs/meeting/2026_07_08.pptx
@@ -5,7 +5,7 @@
     <p:sldMasterId id="2147483648" r:id="rId1"/>
   </p:sldMasterIdLst>
   <p:notesMasterIdLst>
-    <p:notesMasterId r:id="rId19"/>
+    <p:notesMasterId r:id="rId27"/>
   </p:notesMasterIdLst>
   <p:sldIdLst>
     <p:sldId id="1574" r:id="rId2"/>
@@ -19,12 +19,20 @@
     <p:sldId id="1769" r:id="rId10"/>
     <p:sldId id="1739" r:id="rId11"/>
     <p:sldId id="1749" r:id="rId12"/>
-    <p:sldId id="1768" r:id="rId13"/>
-    <p:sldId id="1770" r:id="rId14"/>
-    <p:sldId id="1729" r:id="rId15"/>
-    <p:sldId id="1730" r:id="rId16"/>
-    <p:sldId id="1757" r:id="rId17"/>
-    <p:sldId id="1767" r:id="rId18"/>
+    <p:sldId id="1772" r:id="rId13"/>
+    <p:sldId id="1768" r:id="rId14"/>
+    <p:sldId id="1770" r:id="rId15"/>
+    <p:sldId id="1757" r:id="rId16"/>
+    <p:sldId id="1773" r:id="rId17"/>
+    <p:sldId id="1776" r:id="rId18"/>
+    <p:sldId id="1775" r:id="rId19"/>
+    <p:sldId id="1777" r:id="rId20"/>
+    <p:sldId id="1778" r:id="rId21"/>
+    <p:sldId id="1779" r:id="rId22"/>
+    <p:sldId id="1774" r:id="rId23"/>
+    <p:sldId id="1729" r:id="rId24"/>
+    <p:sldId id="1730" r:id="rId25"/>
+    <p:sldId id="1767" r:id="rId26"/>
   </p:sldIdLst>
   <p:sldSz cx="12192000" cy="6858000"/>
   <p:notesSz cx="6858000" cy="9144000"/>
@@ -143,11 +151,19 @@
             <p14:sldId id="1769"/>
             <p14:sldId id="1739"/>
             <p14:sldId id="1749"/>
+            <p14:sldId id="1772"/>
             <p14:sldId id="1768"/>
             <p14:sldId id="1770"/>
+            <p14:sldId id="1757"/>
+            <p14:sldId id="1773"/>
+            <p14:sldId id="1776"/>
+            <p14:sldId id="1775"/>
+            <p14:sldId id="1777"/>
+            <p14:sldId id="1778"/>
+            <p14:sldId id="1779"/>
+            <p14:sldId id="1774"/>
             <p14:sldId id="1729"/>
             <p14:sldId id="1730"/>
-            <p14:sldId id="1757"/>
             <p14:sldId id="1767"/>
           </p14:sldIdLst>
         </p14:section>
@@ -5994,7 +6010,7 @@
           <a:p>
             <a:fld id="{2915196C-CDBC-4DEE-A220-849C85FC22AC}" type="datetimeFigureOut">
               <a:rPr lang="he-IL" smtClean="0"/>
-              <a:t>כ"ג/תמוז/תשפ"ו</a:t>
+              <a:t>כ"ד/תמוז/תשפ"ו</a:t>
             </a:fld>
             <a:endParaRPr lang="he-IL"/>
           </a:p>
@@ -6563,7 +6579,7 @@
           <a:p>
             <a:fld id="{FC6B3A86-AB79-4388-8CA5-9FC4B834779B}" type="datetime8">
               <a:rPr lang="he-IL" smtClean="0"/>
-              <a:t>08 יולי 26</a:t>
+              <a:t>09 יולי 26</a:t>
             </a:fld>
             <a:endParaRPr lang="he-IL"/>
           </a:p>
@@ -6786,7 +6802,7 @@
           <a:p>
             <a:fld id="{18F56BC8-8E7D-4896-9980-77BC87FB8E3E}" type="datetime8">
               <a:rPr lang="he-IL" smtClean="0"/>
-              <a:t>08 יולי 26</a:t>
+              <a:t>09 יולי 26</a:t>
             </a:fld>
             <a:endParaRPr lang="he-IL"/>
           </a:p>
@@ -7019,7 +7035,7 @@
           <a:p>
             <a:fld id="{0FE327C8-CB36-417E-834B-544633ADCE63}" type="datetime8">
               <a:rPr lang="he-IL" smtClean="0"/>
-              <a:t>08 יולי 26</a:t>
+              <a:t>09 יולי 26</a:t>
             </a:fld>
             <a:endParaRPr lang="he-IL"/>
           </a:p>
@@ -7137,7 +7153,7 @@
           <a:p>
             <a:fld id="{8E065D1C-C98B-44F5-AB2A-FEE3E85D0A94}" type="datetime8">
               <a:rPr lang="he-IL" smtClean="0"/>
-              <a:t>08 יולי 26</a:t>
+              <a:t>09 יולי 26</a:t>
             </a:fld>
             <a:endParaRPr lang="he-IL"/>
           </a:p>
@@ -7452,7 +7468,7 @@
           <a:p>
             <a:fld id="{7634CBFB-2532-48BA-BAE2-ADD925390740}" type="datetime8">
               <a:rPr lang="he-IL" smtClean="0"/>
-              <a:t>08 יולי 26</a:t>
+              <a:t>09 יולי 26</a:t>
             </a:fld>
             <a:endParaRPr lang="he-IL"/>
           </a:p>
@@ -7735,7 +7751,7 @@
           <a:p>
             <a:fld id="{8EAC1FDD-37C4-4A6B-BF31-779943CE32CF}" type="datetime8">
               <a:rPr lang="he-IL" smtClean="0"/>
-              <a:t>08 יולי 26</a:t>
+              <a:t>09 יולי 26</a:t>
             </a:fld>
             <a:endParaRPr lang="he-IL"/>
           </a:p>
@@ -8048,7 +8064,7 @@
           <a:p>
             <a:fld id="{C73C226C-A76A-4927-8F1D-1BD4AC033ABB}" type="datetime8">
               <a:rPr lang="he-IL" smtClean="0"/>
-              <a:t>08 יולי 26</a:t>
+              <a:t>09 יולי 26</a:t>
             </a:fld>
             <a:endParaRPr lang="he-IL"/>
           </a:p>
@@ -8551,7 +8567,7 @@
           <a:p>
             <a:fld id="{430DF2BF-D428-43E9-B36B-6DD16CF93579}" type="datetime8">
               <a:rPr lang="he-IL" smtClean="0"/>
-              <a:t>08 יולי 26</a:t>
+              <a:t>09 יולי 26</a:t>
             </a:fld>
             <a:endParaRPr lang="he-IL"/>
           </a:p>
@@ -8698,7 +8714,7 @@
           <a:p>
             <a:fld id="{390A9136-4922-4C74-B05C-12CD0951E601}" type="datetime8">
               <a:rPr lang="he-IL" smtClean="0"/>
-              <a:t>08 יולי 26</a:t>
+              <a:t>09 יולי 26</a:t>
             </a:fld>
             <a:endParaRPr lang="he-IL"/>
           </a:p>
@@ -8816,7 +8832,7 @@
           <a:p>
             <a:fld id="{C29F3CA8-2E63-412C-AA06-0D760EBE5965}" type="datetime8">
               <a:rPr lang="he-IL" smtClean="0"/>
-              <a:t>08 יולי 26</a:t>
+              <a:t>09 יולי 26</a:t>
             </a:fld>
             <a:endParaRPr lang="he-IL"/>
           </a:p>
@@ -9138,7 +9154,7 @@
           <a:p>
             <a:fld id="{7AC7B867-AA4A-4FF3-AD8B-0AD0F18EE595}" type="datetime8">
               <a:rPr lang="he-IL" smtClean="0"/>
-              <a:t>08 יולי 26</a:t>
+              <a:t>09 יולי 26</a:t>
             </a:fld>
             <a:endParaRPr lang="he-IL"/>
           </a:p>
@@ -9436,7 +9452,7 @@
           <a:p>
             <a:fld id="{F5E9EBD3-88E8-46DB-BD3B-F935B7013014}" type="datetime8">
               <a:rPr lang="he-IL" smtClean="0"/>
-              <a:t>08 יולי 26</a:t>
+              <a:t>09 יולי 26</a:t>
             </a:fld>
             <a:endParaRPr lang="he-IL"/>
           </a:p>
@@ -9720,7 +9736,7 @@
           <a:p>
             <a:fld id="{8E065D1C-C98B-44F5-AB2A-FEE3E85D0A94}" type="datetime8">
               <a:rPr lang="he-IL" smtClean="0"/>
-              <a:t>08 יולי 26</a:t>
+              <a:t>09 יולי 26</a:t>
             </a:fld>
             <a:endParaRPr lang="he-IL"/>
           </a:p>
@@ -12206,6 +12222,214 @@
         <p:cNvPr id="1" name="">
           <a:extLst>
             <a:ext uri="{FF2B5EF4-FFF2-40B4-BE49-F238E27FC236}">
+              <a16:creationId xmlns:a16="http://schemas.microsoft.com/office/drawing/2014/main" id="{A6BA3CE6-E239-7F5C-75D5-0DA0D256C47A}"/>
+            </a:ext>
+          </a:extLst>
+        </p:cNvPr>
+        <p:cNvGrpSpPr/>
+        <p:nvPr/>
+      </p:nvGrpSpPr>
+      <p:grpSpPr>
+        <a:xfrm>
+          <a:off x="0" y="0"/>
+          <a:ext cx="0" cy="0"/>
+          <a:chOff x="0" y="0"/>
+          <a:chExt cx="0" cy="0"/>
+        </a:xfrm>
+      </p:grpSpPr>
+      <p:sp>
+        <p:nvSpPr>
+          <p:cNvPr id="2" name="Title 1">
+            <a:extLst>
+              <a:ext uri="{FF2B5EF4-FFF2-40B4-BE49-F238E27FC236}">
+                <a16:creationId xmlns:a16="http://schemas.microsoft.com/office/drawing/2014/main" id="{17C3D7C8-8EE6-64E5-C5FB-C4CDA5862224}"/>
+              </a:ext>
+            </a:extLst>
+          </p:cNvPr>
+          <p:cNvSpPr>
+            <a:spLocks noGrp="1"/>
+          </p:cNvSpPr>
+          <p:nvPr>
+            <p:ph type="title"/>
+          </p:nvPr>
+        </p:nvSpPr>
+        <p:spPr/>
+        <p:txBody>
+          <a:bodyPr/>
+          <a:lstStyle/>
+          <a:p>
+            <a:r>
+              <a:rPr lang="en-GB" dirty="0"/>
+              <a:t>K</a:t>
+            </a:r>
+            <a:r>
+              <a:rPr lang="en-IL" dirty="0"/>
+              <a:t>-</a:t>
+            </a:r>
+            <a:r>
+              <a:rPr lang="en-GB" dirty="0"/>
+              <a:t>C</a:t>
+            </a:r>
+            <a:r>
+              <a:rPr lang="en-IL" dirty="0"/>
+              <a:t>ore</a:t>
+            </a:r>
+          </a:p>
+        </p:txBody>
+      </p:sp>
+      <p:sp>
+        <p:nvSpPr>
+          <p:cNvPr id="3" name="Content Placeholder 2">
+            <a:extLst>
+              <a:ext uri="{FF2B5EF4-FFF2-40B4-BE49-F238E27FC236}">
+                <a16:creationId xmlns:a16="http://schemas.microsoft.com/office/drawing/2014/main" id="{F349EBD1-1E19-2423-154E-97AC13DB55BA}"/>
+              </a:ext>
+            </a:extLst>
+          </p:cNvPr>
+          <p:cNvSpPr>
+            <a:spLocks noGrp="1"/>
+          </p:cNvSpPr>
+          <p:nvPr>
+            <p:ph idx="1"/>
+          </p:nvPr>
+        </p:nvSpPr>
+        <p:spPr>
+          <a:xfrm>
+            <a:off x="1243087" y="1825625"/>
+            <a:ext cx="10582656" cy="4769728"/>
+          </a:xfrm>
+        </p:spPr>
+        <p:txBody>
+          <a:bodyPr>
+            <a:normAutofit/>
+          </a:bodyPr>
+          <a:lstStyle/>
+          <a:p>
+            <a:r>
+              <a:rPr lang="en-IL" sz="3600" dirty="0"/>
+              <a:t>An IO driver is </a:t>
+            </a:r>
+            <a:r>
+              <a:rPr lang="en-GB" sz="3600" dirty="0"/>
+              <a:t>part of </a:t>
+            </a:r>
+            <a:r>
+              <a:rPr lang="en-IL" sz="3600" dirty="0"/>
+              <a:t>a network of accounts that </a:t>
+            </a:r>
+            <a:r>
+              <a:rPr lang="en-GB" sz="3600" dirty="0"/>
+              <a:t>coordinate</a:t>
+            </a:r>
+            <a:r>
+              <a:rPr lang="en-IL" sz="3600" dirty="0"/>
+              <a:t>.</a:t>
+            </a:r>
+          </a:p>
+          <a:p>
+            <a:r>
+              <a:rPr lang="en-IL" sz="3600" dirty="0"/>
+              <a:t>This coordinated group can be identified using the node’s </a:t>
+            </a:r>
+            <a:r>
+              <a:rPr lang="en-IL" sz="3600" b="1" dirty="0"/>
+              <a:t>k-core</a:t>
+            </a:r>
+            <a:r>
+              <a:rPr lang="en-IL" sz="3600" dirty="0"/>
+              <a:t> in the behavioural-similarity graph.</a:t>
+            </a:r>
+            <a:endParaRPr lang="en-GB" sz="3600" dirty="0"/>
+          </a:p>
+          <a:p>
+            <a:r>
+              <a:rPr lang="en-IL" sz="3600" dirty="0"/>
+              <a:t>Investigating this k-core can help reveal the group’s shared objectives, IO motivations, and intended targets.</a:t>
+            </a:r>
+          </a:p>
+        </p:txBody>
+      </p:sp>
+      <p:sp>
+        <p:nvSpPr>
+          <p:cNvPr id="4" name="Slide Number Placeholder 3">
+            <a:extLst>
+              <a:ext uri="{FF2B5EF4-FFF2-40B4-BE49-F238E27FC236}">
+                <a16:creationId xmlns:a16="http://schemas.microsoft.com/office/drawing/2014/main" id="{E4B6F689-B7C2-3DDF-7C4B-0C0B1293B832}"/>
+              </a:ext>
+            </a:extLst>
+          </p:cNvPr>
+          <p:cNvSpPr>
+            <a:spLocks noGrp="1"/>
+          </p:cNvSpPr>
+          <p:nvPr>
+            <p:ph type="sldNum" sz="quarter" idx="12"/>
+          </p:nvPr>
+        </p:nvSpPr>
+        <p:spPr/>
+        <p:txBody>
+          <a:bodyPr/>
+          <a:lstStyle/>
+          <a:p>
+            <a:fld id="{E6AB8EDD-9EF2-4633-A1C2-4D908C1019B4}" type="slidenum">
+              <a:rPr lang="he-IL" smtClean="0"/>
+              <a:t>12</a:t>
+            </a:fld>
+            <a:endParaRPr lang="he-IL"/>
+          </a:p>
+        </p:txBody>
+      </p:sp>
+      <p:pic>
+        <p:nvPicPr>
+          <p:cNvPr id="5" name="Picture 4">
+            <a:extLst>
+              <a:ext uri="{FF2B5EF4-FFF2-40B4-BE49-F238E27FC236}">
+                <a16:creationId xmlns:a16="http://schemas.microsoft.com/office/drawing/2014/main" id="{08AEDFA0-1515-344B-4E0B-B4A185049907}"/>
+              </a:ext>
+            </a:extLst>
+          </p:cNvPr>
+          <p:cNvPicPr>
+            <a:picLocks noChangeAspect="1"/>
+          </p:cNvPicPr>
+          <p:nvPr/>
+        </p:nvPicPr>
+        <p:blipFill>
+          <a:blip r:embed="rId2"/>
+          <a:srcRect t="30198" b="12173"/>
+          <a:stretch>
+            <a:fillRect/>
+          </a:stretch>
+        </p:blipFill>
+        <p:spPr>
+          <a:xfrm>
+            <a:off x="3102000" y="5190136"/>
+            <a:ext cx="5987999" cy="1477844"/>
+          </a:xfrm>
+          <a:prstGeom prst="rect">
+            <a:avLst/>
+          </a:prstGeom>
+        </p:spPr>
+      </p:pic>
+    </p:spTree>
+    <p:extLst>
+      <p:ext uri="{BB962C8B-B14F-4D97-AF65-F5344CB8AC3E}">
+        <p14:creationId xmlns:p14="http://schemas.microsoft.com/office/powerpoint/2010/main" val="822568903"/>
+      </p:ext>
+    </p:extLst>
+  </p:cSld>
+  <p:clrMapOvr>
+    <a:masterClrMapping/>
+  </p:clrMapOvr>
+</p:sld>
+</file>
+
+<file path=ppt/slides/slide13.xml><?xml version="1.0" encoding="utf-8"?>
+<p:sld xmlns:a="http://schemas.openxmlformats.org/drawingml/2006/main" xmlns:r="http://schemas.openxmlformats.org/officeDocument/2006/relationships" xmlns:p="http://schemas.openxmlformats.org/presentationml/2006/main">
+  <p:cSld>
+    <p:spTree>
+      <p:nvGrpSpPr>
+        <p:cNvPr id="1" name="">
+          <a:extLst>
+            <a:ext uri="{FF2B5EF4-FFF2-40B4-BE49-F238E27FC236}">
               <a16:creationId xmlns:a16="http://schemas.microsoft.com/office/drawing/2014/main" id="{A541039E-B86D-D32C-4EF0-FA604B11E497}"/>
             </a:ext>
           </a:extLst>
@@ -12303,7 +12527,7 @@
           <a:p>
             <a:fld id="{E6AB8EDD-9EF2-4633-A1C2-4D908C1019B4}" type="slidenum">
               <a:rPr lang="he-IL" smtClean="0"/>
-              <a:t>12</a:t>
+              <a:t>13</a:t>
             </a:fld>
             <a:endParaRPr lang="he-IL"/>
           </a:p>
@@ -12322,7 +12546,7 @@
 </p:sld>
 </file>
 
-<file path=ppt/slides/slide13.xml><?xml version="1.0" encoding="utf-8"?>
+<file path=ppt/slides/slide14.xml><?xml version="1.0" encoding="utf-8"?>
 <p:sld xmlns:a="http://schemas.openxmlformats.org/drawingml/2006/main" xmlns:r="http://schemas.openxmlformats.org/officeDocument/2006/relationships" xmlns:p="http://schemas.openxmlformats.org/presentationml/2006/main">
   <p:cSld>
     <p:spTree>
@@ -12540,7 +12764,7 @@
           <a:p>
             <a:fld id="{E6AB8EDD-9EF2-4633-A1C2-4D908C1019B4}" type="slidenum">
               <a:rPr lang="he-IL" smtClean="0"/>
-              <a:t>13</a:t>
+              <a:t>14</a:t>
             </a:fld>
             <a:endParaRPr lang="he-IL"/>
           </a:p>
@@ -12559,7 +12783,2075 @@
 </p:sld>
 </file>
 
-<file path=ppt/slides/slide14.xml><?xml version="1.0" encoding="utf-8"?>
+<file path=ppt/slides/slide15.xml><?xml version="1.0" encoding="utf-8"?>
+<p:sld xmlns:a="http://schemas.openxmlformats.org/drawingml/2006/main" xmlns:r="http://schemas.openxmlformats.org/officeDocument/2006/relationships" xmlns:p="http://schemas.openxmlformats.org/presentationml/2006/main">
+  <p:cSld>
+    <p:spTree>
+      <p:nvGrpSpPr>
+        <p:cNvPr id="1" name="">
+          <a:extLst>
+            <a:ext uri="{FF2B5EF4-FFF2-40B4-BE49-F238E27FC236}">
+              <a16:creationId xmlns:a16="http://schemas.microsoft.com/office/drawing/2014/main" id="{49FBFB06-31E1-F12E-61E2-AD9CFD94A3A2}"/>
+            </a:ext>
+          </a:extLst>
+        </p:cNvPr>
+        <p:cNvGrpSpPr/>
+        <p:nvPr/>
+      </p:nvGrpSpPr>
+      <p:grpSpPr>
+        <a:xfrm>
+          <a:off x="0" y="0"/>
+          <a:ext cx="0" cy="0"/>
+          <a:chOff x="0" y="0"/>
+          <a:chExt cx="0" cy="0"/>
+        </a:xfrm>
+      </p:grpSpPr>
+      <p:pic>
+        <p:nvPicPr>
+          <p:cNvPr id="6" name="Picture 5">
+            <a:extLst>
+              <a:ext uri="{FF2B5EF4-FFF2-40B4-BE49-F238E27FC236}">
+                <a16:creationId xmlns:a16="http://schemas.microsoft.com/office/drawing/2014/main" id="{AF6BC6AE-4687-A2A7-935B-0F2E9F9154B3}"/>
+              </a:ext>
+            </a:extLst>
+          </p:cNvPr>
+          <p:cNvPicPr>
+            <a:picLocks noChangeAspect="1"/>
+          </p:cNvPicPr>
+          <p:nvPr/>
+        </p:nvPicPr>
+        <p:blipFill>
+          <a:blip r:embed="rId2"/>
+          <a:stretch>
+            <a:fillRect/>
+          </a:stretch>
+        </p:blipFill>
+        <p:spPr>
+          <a:xfrm>
+            <a:off x="1440246" y="1580010"/>
+            <a:ext cx="4893567" cy="2297374"/>
+          </a:xfrm>
+          <a:prstGeom prst="rect">
+            <a:avLst/>
+          </a:prstGeom>
+        </p:spPr>
+      </p:pic>
+      <p:pic>
+        <p:nvPicPr>
+          <p:cNvPr id="9" name="Picture 8">
+            <a:extLst>
+              <a:ext uri="{FF2B5EF4-FFF2-40B4-BE49-F238E27FC236}">
+                <a16:creationId xmlns:a16="http://schemas.microsoft.com/office/drawing/2014/main" id="{142AE667-C784-0DA7-5A0E-CB08BA36F635}"/>
+              </a:ext>
+            </a:extLst>
+          </p:cNvPr>
+          <p:cNvPicPr>
+            <a:picLocks noChangeAspect="1"/>
+          </p:cNvPicPr>
+          <p:nvPr/>
+        </p:nvPicPr>
+        <p:blipFill>
+          <a:blip r:embed="rId3"/>
+          <a:stretch>
+            <a:fillRect/>
+          </a:stretch>
+        </p:blipFill>
+        <p:spPr>
+          <a:xfrm>
+            <a:off x="6818609" y="1559914"/>
+            <a:ext cx="4920610" cy="2310068"/>
+          </a:xfrm>
+          <a:prstGeom prst="rect">
+            <a:avLst/>
+          </a:prstGeom>
+        </p:spPr>
+      </p:pic>
+      <p:sp>
+        <p:nvSpPr>
+          <p:cNvPr id="2" name="Title 1">
+            <a:extLst>
+              <a:ext uri="{FF2B5EF4-FFF2-40B4-BE49-F238E27FC236}">
+                <a16:creationId xmlns:a16="http://schemas.microsoft.com/office/drawing/2014/main" id="{41BDCE7F-99C3-9474-F9E6-66CB34E1923E}"/>
+              </a:ext>
+            </a:extLst>
+          </p:cNvPr>
+          <p:cNvSpPr>
+            <a:spLocks noGrp="1"/>
+          </p:cNvSpPr>
+          <p:nvPr>
+            <p:ph type="title"/>
+          </p:nvPr>
+        </p:nvSpPr>
+        <p:spPr/>
+        <p:txBody>
+          <a:bodyPr>
+            <a:normAutofit/>
+          </a:bodyPr>
+          <a:lstStyle/>
+          <a:p>
+            <a:r>
+              <a:rPr lang="en-GB" dirty="0"/>
+              <a:t>Core Number</a:t>
+            </a:r>
+            <a:endParaRPr lang="en-IL" sz="2400" dirty="0"/>
+          </a:p>
+        </p:txBody>
+      </p:sp>
+      <p:sp>
+        <p:nvSpPr>
+          <p:cNvPr id="3" name="Content Placeholder 2">
+            <a:extLst>
+              <a:ext uri="{FF2B5EF4-FFF2-40B4-BE49-F238E27FC236}">
+                <a16:creationId xmlns:a16="http://schemas.microsoft.com/office/drawing/2014/main" id="{D3A2D5A9-A078-1290-ACCC-0C6203E31A92}"/>
+              </a:ext>
+            </a:extLst>
+          </p:cNvPr>
+          <p:cNvSpPr>
+            <a:spLocks noGrp="1"/>
+          </p:cNvSpPr>
+          <p:nvPr>
+            <p:ph idx="1"/>
+          </p:nvPr>
+        </p:nvSpPr>
+        <p:spPr>
+          <a:xfrm>
+            <a:off x="1243086" y="1825624"/>
+            <a:ext cx="10850301" cy="5004149"/>
+          </a:xfrm>
+        </p:spPr>
+        <p:txBody>
+          <a:bodyPr>
+            <a:normAutofit/>
+          </a:bodyPr>
+          <a:lstStyle/>
+          <a:p>
+            <a:pPr marL="0" indent="0">
+              <a:buNone/>
+            </a:pPr>
+            <a:endParaRPr lang="en-GB" sz="2000" b="1" dirty="0"/>
+          </a:p>
+          <a:p>
+            <a:pPr lvl="2"/>
+            <a:endParaRPr lang="en-GB" sz="1500" dirty="0"/>
+          </a:p>
+          <a:p>
+            <a:pPr marL="914400" lvl="2" indent="0">
+              <a:buNone/>
+            </a:pPr>
+            <a:endParaRPr lang="en-GB" sz="1500" dirty="0"/>
+          </a:p>
+        </p:txBody>
+      </p:sp>
+      <p:sp>
+        <p:nvSpPr>
+          <p:cNvPr id="4" name="Slide Number Placeholder 3">
+            <a:extLst>
+              <a:ext uri="{FF2B5EF4-FFF2-40B4-BE49-F238E27FC236}">
+                <a16:creationId xmlns:a16="http://schemas.microsoft.com/office/drawing/2014/main" id="{33A23E22-B25F-6C61-B14B-75EEE667A008}"/>
+              </a:ext>
+            </a:extLst>
+          </p:cNvPr>
+          <p:cNvSpPr>
+            <a:spLocks noGrp="1"/>
+          </p:cNvSpPr>
+          <p:nvPr>
+            <p:ph type="sldNum" sz="quarter" idx="12"/>
+          </p:nvPr>
+        </p:nvSpPr>
+        <p:spPr/>
+        <p:txBody>
+          <a:bodyPr/>
+          <a:lstStyle/>
+          <a:p>
+            <a:fld id="{E6AB8EDD-9EF2-4633-A1C2-4D908C1019B4}" type="slidenum">
+              <a:rPr lang="he-IL" smtClean="0"/>
+              <a:t>15</a:t>
+            </a:fld>
+            <a:endParaRPr lang="he-IL"/>
+          </a:p>
+        </p:txBody>
+      </p:sp>
+      <p:sp>
+        <p:nvSpPr>
+          <p:cNvPr id="5" name="TextBox 4">
+            <a:extLst>
+              <a:ext uri="{FF2B5EF4-FFF2-40B4-BE49-F238E27FC236}">
+                <a16:creationId xmlns:a16="http://schemas.microsoft.com/office/drawing/2014/main" id="{F1D85B4F-AF7F-749F-77C1-315E6E06566E}"/>
+              </a:ext>
+            </a:extLst>
+          </p:cNvPr>
+          <p:cNvSpPr txBox="1"/>
+          <p:nvPr/>
+        </p:nvSpPr>
+        <p:spPr>
+          <a:xfrm>
+            <a:off x="6659873" y="1186618"/>
+            <a:ext cx="2214283" cy="369332"/>
+          </a:xfrm>
+          <a:prstGeom prst="rect">
+            <a:avLst/>
+          </a:prstGeom>
+          <a:noFill/>
+        </p:spPr>
+        <p:txBody>
+          <a:bodyPr wrap="square" rtlCol="0">
+            <a:spAutoFit/>
+          </a:bodyPr>
+          <a:lstStyle/>
+          <a:p>
+            <a:pPr algn="ctr"/>
+            <a:r>
+              <a:rPr lang="en-US" dirty="0"/>
+              <a:t>Ecuador </a:t>
+            </a:r>
+            <a:r>
+              <a:rPr lang="en-GB" dirty="0"/>
+              <a:t>Campaign</a:t>
+            </a:r>
+            <a:endParaRPr lang="en-IL" dirty="0"/>
+          </a:p>
+        </p:txBody>
+      </p:sp>
+      <p:sp>
+        <p:nvSpPr>
+          <p:cNvPr id="10" name="TextBox 9">
+            <a:extLst>
+              <a:ext uri="{FF2B5EF4-FFF2-40B4-BE49-F238E27FC236}">
+                <a16:creationId xmlns:a16="http://schemas.microsoft.com/office/drawing/2014/main" id="{403E0586-5C53-F6ED-1E5A-96C49F4642C9}"/>
+              </a:ext>
+            </a:extLst>
+          </p:cNvPr>
+          <p:cNvSpPr txBox="1"/>
+          <p:nvPr/>
+        </p:nvSpPr>
+        <p:spPr>
+          <a:xfrm>
+            <a:off x="1440246" y="6223634"/>
+            <a:ext cx="6923825" cy="646331"/>
+          </a:xfrm>
+          <a:prstGeom prst="rect">
+            <a:avLst/>
+          </a:prstGeom>
+          <a:noFill/>
+        </p:spPr>
+        <p:txBody>
+          <a:bodyPr wrap="square" rtlCol="0">
+            <a:spAutoFit/>
+          </a:bodyPr>
+          <a:lstStyle/>
+          <a:p>
+            <a:r>
+              <a:rPr lang="en-GB" b="1" dirty="0"/>
+              <a:t>Cumulative distribution: proportion of IO drivers by Core Number threshold (≤ / ≥)</a:t>
+            </a:r>
+            <a:endParaRPr lang="en-IL" b="1" dirty="0"/>
+          </a:p>
+        </p:txBody>
+      </p:sp>
+      <p:pic>
+        <p:nvPicPr>
+          <p:cNvPr id="12" name="Picture 11">
+            <a:extLst>
+              <a:ext uri="{FF2B5EF4-FFF2-40B4-BE49-F238E27FC236}">
+                <a16:creationId xmlns:a16="http://schemas.microsoft.com/office/drawing/2014/main" id="{ED8B88D7-4ED4-985E-8371-C40F0673F867}"/>
+              </a:ext>
+            </a:extLst>
+          </p:cNvPr>
+          <p:cNvPicPr>
+            <a:picLocks noChangeAspect="1"/>
+          </p:cNvPicPr>
+          <p:nvPr/>
+        </p:nvPicPr>
+        <p:blipFill>
+          <a:blip r:embed="rId4"/>
+          <a:stretch>
+            <a:fillRect/>
+          </a:stretch>
+        </p:blipFill>
+        <p:spPr>
+          <a:xfrm>
+            <a:off x="1543939" y="3917576"/>
+            <a:ext cx="4893567" cy="2252632"/>
+          </a:xfrm>
+          <a:prstGeom prst="rect">
+            <a:avLst/>
+          </a:prstGeom>
+        </p:spPr>
+      </p:pic>
+      <p:pic>
+        <p:nvPicPr>
+          <p:cNvPr id="13" name="Picture 12">
+            <a:extLst>
+              <a:ext uri="{FF2B5EF4-FFF2-40B4-BE49-F238E27FC236}">
+                <a16:creationId xmlns:a16="http://schemas.microsoft.com/office/drawing/2014/main" id="{CEFBE902-A18C-18D2-66ED-BC4E7994D22D}"/>
+              </a:ext>
+            </a:extLst>
+          </p:cNvPr>
+          <p:cNvPicPr>
+            <a:picLocks noChangeAspect="1"/>
+          </p:cNvPicPr>
+          <p:nvPr/>
+        </p:nvPicPr>
+        <p:blipFill>
+          <a:blip r:embed="rId5"/>
+          <a:stretch>
+            <a:fillRect/>
+          </a:stretch>
+        </p:blipFill>
+        <p:spPr>
+          <a:xfrm>
+            <a:off x="6846984" y="3953617"/>
+            <a:ext cx="4863860" cy="2323694"/>
+          </a:xfrm>
+          <a:prstGeom prst="rect">
+            <a:avLst/>
+          </a:prstGeom>
+        </p:spPr>
+      </p:pic>
+    </p:spTree>
+    <p:extLst>
+      <p:ext uri="{BB962C8B-B14F-4D97-AF65-F5344CB8AC3E}">
+        <p14:creationId xmlns:p14="http://schemas.microsoft.com/office/powerpoint/2010/main" val="3856546097"/>
+      </p:ext>
+    </p:extLst>
+  </p:cSld>
+  <p:clrMapOvr>
+    <a:masterClrMapping/>
+  </p:clrMapOvr>
+</p:sld>
+</file>
+
+<file path=ppt/slides/slide16.xml><?xml version="1.0" encoding="utf-8"?>
+<p:sld xmlns:a="http://schemas.openxmlformats.org/drawingml/2006/main" xmlns:r="http://schemas.openxmlformats.org/officeDocument/2006/relationships" xmlns:p="http://schemas.openxmlformats.org/presentationml/2006/main">
+  <p:cSld>
+    <p:spTree>
+      <p:nvGrpSpPr>
+        <p:cNvPr id="1" name="">
+          <a:extLst>
+            <a:ext uri="{FF2B5EF4-FFF2-40B4-BE49-F238E27FC236}">
+              <a16:creationId xmlns:a16="http://schemas.microsoft.com/office/drawing/2014/main" id="{BA2F4426-938D-DED9-F61F-1488E4F336DA}"/>
+            </a:ext>
+          </a:extLst>
+        </p:cNvPr>
+        <p:cNvGrpSpPr/>
+        <p:nvPr/>
+      </p:nvGrpSpPr>
+      <p:grpSpPr>
+        <a:xfrm>
+          <a:off x="0" y="0"/>
+          <a:ext cx="0" cy="0"/>
+          <a:chOff x="0" y="0"/>
+          <a:chExt cx="0" cy="0"/>
+        </a:xfrm>
+      </p:grpSpPr>
+      <p:sp>
+        <p:nvSpPr>
+          <p:cNvPr id="2" name="Title 1">
+            <a:extLst>
+              <a:ext uri="{FF2B5EF4-FFF2-40B4-BE49-F238E27FC236}">
+                <a16:creationId xmlns:a16="http://schemas.microsoft.com/office/drawing/2014/main" id="{48824EFC-3943-4271-DC87-8F6DA525869A}"/>
+              </a:ext>
+            </a:extLst>
+          </p:cNvPr>
+          <p:cNvSpPr>
+            <a:spLocks noGrp="1"/>
+          </p:cNvSpPr>
+          <p:nvPr>
+            <p:ph type="title"/>
+          </p:nvPr>
+        </p:nvSpPr>
+        <p:spPr>
+          <a:xfrm>
+            <a:off x="3072268" y="401637"/>
+            <a:ext cx="8753475" cy="1325563"/>
+          </a:xfrm>
+        </p:spPr>
+        <p:txBody>
+          <a:bodyPr anchor="ctr">
+            <a:normAutofit/>
+          </a:bodyPr>
+          <a:lstStyle/>
+          <a:p>
+            <a:r>
+              <a:rPr lang="en-GB" dirty="0"/>
+              <a:t>K-Core Example</a:t>
+            </a:r>
+            <a:endParaRPr lang="en-IL" dirty="0"/>
+          </a:p>
+        </p:txBody>
+      </p:sp>
+      <p:sp>
+        <p:nvSpPr>
+          <p:cNvPr id="3" name="Content Placeholder 2">
+            <a:extLst>
+              <a:ext uri="{FF2B5EF4-FFF2-40B4-BE49-F238E27FC236}">
+                <a16:creationId xmlns:a16="http://schemas.microsoft.com/office/drawing/2014/main" id="{807F4872-7C96-34B8-BFB5-C94EB1871B1B}"/>
+              </a:ext>
+            </a:extLst>
+          </p:cNvPr>
+          <p:cNvSpPr>
+            <a:spLocks noGrp="1"/>
+          </p:cNvSpPr>
+          <p:nvPr>
+            <p:ph sz="half" idx="1"/>
+          </p:nvPr>
+        </p:nvSpPr>
+        <p:spPr>
+          <a:xfrm>
+            <a:off x="1236990" y="1821101"/>
+            <a:ext cx="5710657" cy="4749032"/>
+          </a:xfrm>
+        </p:spPr>
+        <p:txBody>
+          <a:bodyPr>
+            <a:noAutofit/>
+          </a:bodyPr>
+          <a:lstStyle/>
+          <a:p>
+            <a:r>
+              <a:rPr lang="en-IL" sz="3200" dirty="0"/>
+              <a:t>One of the authors with the highest core number was selected</a:t>
+            </a:r>
+            <a:r>
+              <a:rPr lang="en-GB" sz="3200" dirty="0"/>
+              <a:t>:</a:t>
+            </a:r>
+          </a:p>
+          <a:p>
+            <a:pPr lvl="1"/>
+            <a:r>
+              <a:rPr lang="en-IL" sz="1500" dirty="0"/>
+              <a:t>Account ID:</a:t>
+            </a:r>
+            <a:r>
+              <a:rPr lang="en-GB" sz="1500" dirty="0"/>
+              <a:t> </a:t>
+            </a:r>
+            <a:r>
+              <a:rPr lang="en-IL" sz="1500" dirty="0"/>
+              <a:t>71cc57155d061d447c2c65756c7dfd6873e403a097</a:t>
+            </a:r>
+            <a:endParaRPr lang="en-GB" sz="1500" dirty="0"/>
+          </a:p>
+          <a:p>
+            <a:pPr lvl="1"/>
+            <a:r>
+              <a:rPr lang="en-IL" sz="1500" dirty="0"/>
+              <a:t>Core number: 106 </a:t>
+            </a:r>
+            <a:endParaRPr lang="en-GB" sz="1500" dirty="0"/>
+          </a:p>
+          <a:p>
+            <a:r>
+              <a:rPr lang="en-IL" sz="3200" dirty="0"/>
+              <a:t>The corresponding </a:t>
+            </a:r>
+            <a:r>
+              <a:rPr lang="en-IL" sz="3200" b="1" dirty="0"/>
+              <a:t>k-core</a:t>
+            </a:r>
+            <a:r>
+              <a:rPr lang="en-IL" sz="3200" dirty="0"/>
+              <a:t> was extracted. </a:t>
+            </a:r>
+            <a:endParaRPr lang="en-GB" sz="3200" dirty="0"/>
+          </a:p>
+          <a:p>
+            <a:r>
+              <a:rPr lang="en-IL" sz="3200" dirty="0"/>
+              <a:t>The k-core contains </a:t>
+            </a:r>
+            <a:r>
+              <a:rPr lang="en-IL" sz="3200" b="1" dirty="0"/>
+              <a:t>107 nodes</a:t>
+            </a:r>
+            <a:r>
+              <a:rPr lang="en-IL" sz="3200" dirty="0"/>
+              <a:t>.</a:t>
+            </a:r>
+          </a:p>
+        </p:txBody>
+      </p:sp>
+      <p:sp>
+        <p:nvSpPr>
+          <p:cNvPr id="4" name="Slide Number Placeholder 3">
+            <a:extLst>
+              <a:ext uri="{FF2B5EF4-FFF2-40B4-BE49-F238E27FC236}">
+                <a16:creationId xmlns:a16="http://schemas.microsoft.com/office/drawing/2014/main" id="{47A72417-CA92-53AF-A865-04034A0FF41C}"/>
+              </a:ext>
+            </a:extLst>
+          </p:cNvPr>
+          <p:cNvSpPr>
+            <a:spLocks noGrp="1"/>
+          </p:cNvSpPr>
+          <p:nvPr>
+            <p:ph type="sldNum" sz="quarter" idx="12"/>
+          </p:nvPr>
+        </p:nvSpPr>
+        <p:spPr>
+          <a:xfrm>
+            <a:off x="11728704" y="6464649"/>
+            <a:ext cx="452233" cy="365125"/>
+          </a:xfrm>
+        </p:spPr>
+        <p:txBody>
+          <a:bodyPr anchor="ctr">
+            <a:normAutofit/>
+          </a:bodyPr>
+          <a:lstStyle/>
+          <a:p>
+            <a:pPr>
+              <a:spcAft>
+                <a:spcPts val="600"/>
+              </a:spcAft>
+            </a:pPr>
+            <a:fld id="{E6AB8EDD-9EF2-4633-A1C2-4D908C1019B4}" type="slidenum">
+              <a:rPr lang="he-IL" smtClean="0"/>
+              <a:pPr>
+                <a:spcAft>
+                  <a:spcPts val="600"/>
+                </a:spcAft>
+              </a:pPr>
+              <a:t>16</a:t>
+            </a:fld>
+            <a:endParaRPr lang="he-IL"/>
+          </a:p>
+        </p:txBody>
+      </p:sp>
+      <p:pic>
+        <p:nvPicPr>
+          <p:cNvPr id="14" name="Content Placeholder 13">
+            <a:extLst>
+              <a:ext uri="{FF2B5EF4-FFF2-40B4-BE49-F238E27FC236}">
+                <a16:creationId xmlns:a16="http://schemas.microsoft.com/office/drawing/2014/main" id="{90FD3490-4134-E81B-C98D-221084472996}"/>
+              </a:ext>
+            </a:extLst>
+          </p:cNvPr>
+          <p:cNvPicPr>
+            <a:picLocks noChangeAspect="1"/>
+          </p:cNvPicPr>
+          <p:nvPr/>
+        </p:nvPicPr>
+        <p:blipFill>
+          <a:blip r:embed="rId2"/>
+          <a:srcRect l="7336" t="8037" r="8100" b="7627"/>
+          <a:stretch>
+            <a:fillRect/>
+          </a:stretch>
+        </p:blipFill>
+        <p:spPr>
+          <a:xfrm>
+            <a:off x="6841153" y="1727200"/>
+            <a:ext cx="5181600" cy="4360820"/>
+          </a:xfrm>
+          <a:prstGeom prst="rect">
+            <a:avLst/>
+          </a:prstGeom>
+        </p:spPr>
+      </p:pic>
+    </p:spTree>
+    <p:extLst>
+      <p:ext uri="{BB962C8B-B14F-4D97-AF65-F5344CB8AC3E}">
+        <p14:creationId xmlns:p14="http://schemas.microsoft.com/office/powerpoint/2010/main" val="3196827863"/>
+      </p:ext>
+    </p:extLst>
+  </p:cSld>
+  <p:clrMapOvr>
+    <a:masterClrMapping/>
+  </p:clrMapOvr>
+</p:sld>
+</file>
+
+<file path=ppt/slides/slide17.xml><?xml version="1.0" encoding="utf-8"?>
+<p:sld xmlns:a="http://schemas.openxmlformats.org/drawingml/2006/main" xmlns:r="http://schemas.openxmlformats.org/officeDocument/2006/relationships" xmlns:p="http://schemas.openxmlformats.org/presentationml/2006/main">
+  <p:cSld>
+    <p:spTree>
+      <p:nvGrpSpPr>
+        <p:cNvPr id="1" name="">
+          <a:extLst>
+            <a:ext uri="{FF2B5EF4-FFF2-40B4-BE49-F238E27FC236}">
+              <a16:creationId xmlns:a16="http://schemas.microsoft.com/office/drawing/2014/main" id="{FB05A739-4D45-99F4-2BC9-75A9F3306471}"/>
+            </a:ext>
+          </a:extLst>
+        </p:cNvPr>
+        <p:cNvGrpSpPr/>
+        <p:nvPr/>
+      </p:nvGrpSpPr>
+      <p:grpSpPr>
+        <a:xfrm>
+          <a:off x="0" y="0"/>
+          <a:ext cx="0" cy="0"/>
+          <a:chOff x="0" y="0"/>
+          <a:chExt cx="0" cy="0"/>
+        </a:xfrm>
+      </p:grpSpPr>
+      <p:sp>
+        <p:nvSpPr>
+          <p:cNvPr id="2" name="Title 1">
+            <a:extLst>
+              <a:ext uri="{FF2B5EF4-FFF2-40B4-BE49-F238E27FC236}">
+                <a16:creationId xmlns:a16="http://schemas.microsoft.com/office/drawing/2014/main" id="{3F004ED6-11D7-12A9-2265-F75A40934002}"/>
+              </a:ext>
+            </a:extLst>
+          </p:cNvPr>
+          <p:cNvSpPr>
+            <a:spLocks noGrp="1"/>
+          </p:cNvSpPr>
+          <p:nvPr>
+            <p:ph type="title"/>
+          </p:nvPr>
+        </p:nvSpPr>
+        <p:spPr>
+          <a:xfrm>
+            <a:off x="3072268" y="401637"/>
+            <a:ext cx="8753475" cy="1325563"/>
+          </a:xfrm>
+        </p:spPr>
+        <p:txBody>
+          <a:bodyPr anchor="ctr">
+            <a:normAutofit/>
+          </a:bodyPr>
+          <a:lstStyle/>
+          <a:p>
+            <a:r>
+              <a:rPr lang="en-GB" dirty="0"/>
+              <a:t>K-Core Example</a:t>
+            </a:r>
+            <a:endParaRPr lang="en-IL" dirty="0"/>
+          </a:p>
+        </p:txBody>
+      </p:sp>
+      <p:sp>
+        <p:nvSpPr>
+          <p:cNvPr id="3" name="Content Placeholder 2">
+            <a:extLst>
+              <a:ext uri="{FF2B5EF4-FFF2-40B4-BE49-F238E27FC236}">
+                <a16:creationId xmlns:a16="http://schemas.microsoft.com/office/drawing/2014/main" id="{A838AA8F-DD88-0598-AD39-6E3410D8DACF}"/>
+              </a:ext>
+            </a:extLst>
+          </p:cNvPr>
+          <p:cNvSpPr>
+            <a:spLocks noGrp="1"/>
+          </p:cNvSpPr>
+          <p:nvPr>
+            <p:ph sz="half" idx="1"/>
+          </p:nvPr>
+        </p:nvSpPr>
+        <p:spPr>
+          <a:xfrm>
+            <a:off x="1236990" y="1821101"/>
+            <a:ext cx="9215857" cy="4749032"/>
+          </a:xfrm>
+        </p:spPr>
+        <p:txBody>
+          <a:bodyPr>
+            <a:noAutofit/>
+          </a:bodyPr>
+          <a:lstStyle/>
+          <a:p>
+            <a:r>
+              <a:rPr lang="en-GB" sz="3200" dirty="0"/>
+              <a:t>Three</a:t>
+            </a:r>
+            <a:r>
+              <a:rPr lang="en-IL" sz="3200" dirty="0"/>
+              <a:t> </a:t>
+            </a:r>
+            <a:r>
+              <a:rPr lang="en-GB" sz="3200" dirty="0"/>
+              <a:t>accounts/nodes</a:t>
+            </a:r>
+            <a:r>
+              <a:rPr lang="en-IL" sz="3200" dirty="0"/>
+              <a:t> from the same k-core were selected</a:t>
+            </a:r>
+            <a:r>
+              <a:rPr lang="en-GB" sz="3200" dirty="0"/>
+              <a:t> at random</a:t>
+            </a:r>
+            <a:r>
+              <a:rPr lang="en-IL" sz="3200" dirty="0"/>
+              <a:t> for </a:t>
+            </a:r>
+            <a:r>
+              <a:rPr lang="en-GB" sz="3200" dirty="0"/>
+              <a:t>deep analysis:</a:t>
+            </a:r>
+          </a:p>
+          <a:p>
+            <a:pPr lvl="1"/>
+            <a:r>
+              <a:rPr lang="en-GB" sz="2400" dirty="0"/>
+              <a:t>Account: </a:t>
+            </a:r>
+            <a:r>
+              <a:rPr lang="en-IL" sz="2400" dirty="0"/>
+              <a:t>71cc57155d061d447c2c65756c7dfd6873e403a097</a:t>
+            </a:r>
+            <a:r>
+              <a:rPr lang="en-GB" sz="2400" dirty="0"/>
+              <a:t> </a:t>
+            </a:r>
+          </a:p>
+          <a:p>
+            <a:pPr lvl="1"/>
+            <a:r>
+              <a:rPr lang="en-GB" sz="2400" dirty="0"/>
+              <a:t>Account: </a:t>
+            </a:r>
+            <a:r>
+              <a:rPr lang="en-IL" sz="2400" dirty="0"/>
+              <a:t>4356e554e26d3b89f45ecfdee41cc2bd57a86bf2bb</a:t>
+            </a:r>
+            <a:endParaRPr lang="en-GB" sz="2400" dirty="0"/>
+          </a:p>
+          <a:p>
+            <a:pPr lvl="1"/>
+            <a:r>
+              <a:rPr lang="en-GB" sz="2400" dirty="0"/>
+              <a:t>Account: </a:t>
+            </a:r>
+            <a:r>
+              <a:rPr lang="en-IL" sz="2400" dirty="0"/>
+              <a:t>712125a6c1b43b2c54bfbc73386d54d6d35a3f9d0f</a:t>
+            </a:r>
+            <a:endParaRPr lang="en-GB" sz="2400" dirty="0"/>
+          </a:p>
+          <a:p>
+            <a:pPr lvl="1"/>
+            <a:endParaRPr lang="en-GB" dirty="0"/>
+          </a:p>
+          <a:p>
+            <a:pPr lvl="1"/>
+            <a:endParaRPr lang="en-GB" sz="3000" dirty="0"/>
+          </a:p>
+          <a:p>
+            <a:endParaRPr lang="en-IL" sz="3200" dirty="0"/>
+          </a:p>
+        </p:txBody>
+      </p:sp>
+      <p:sp>
+        <p:nvSpPr>
+          <p:cNvPr id="4" name="Slide Number Placeholder 3">
+            <a:extLst>
+              <a:ext uri="{FF2B5EF4-FFF2-40B4-BE49-F238E27FC236}">
+                <a16:creationId xmlns:a16="http://schemas.microsoft.com/office/drawing/2014/main" id="{8B86E8B1-AD2D-D7D9-1B06-A1BEC7EC9ACE}"/>
+              </a:ext>
+            </a:extLst>
+          </p:cNvPr>
+          <p:cNvSpPr>
+            <a:spLocks noGrp="1"/>
+          </p:cNvSpPr>
+          <p:nvPr>
+            <p:ph type="sldNum" sz="quarter" idx="12"/>
+          </p:nvPr>
+        </p:nvSpPr>
+        <p:spPr>
+          <a:xfrm>
+            <a:off x="11728704" y="6464649"/>
+            <a:ext cx="452233" cy="365125"/>
+          </a:xfrm>
+        </p:spPr>
+        <p:txBody>
+          <a:bodyPr anchor="ctr">
+            <a:normAutofit/>
+          </a:bodyPr>
+          <a:lstStyle/>
+          <a:p>
+            <a:pPr>
+              <a:spcAft>
+                <a:spcPts val="600"/>
+              </a:spcAft>
+            </a:pPr>
+            <a:fld id="{E6AB8EDD-9EF2-4633-A1C2-4D908C1019B4}" type="slidenum">
+              <a:rPr lang="he-IL" smtClean="0"/>
+              <a:pPr>
+                <a:spcAft>
+                  <a:spcPts val="600"/>
+                </a:spcAft>
+              </a:pPr>
+              <a:t>17</a:t>
+            </a:fld>
+            <a:endParaRPr lang="he-IL"/>
+          </a:p>
+        </p:txBody>
+      </p:sp>
+    </p:spTree>
+    <p:extLst>
+      <p:ext uri="{BB962C8B-B14F-4D97-AF65-F5344CB8AC3E}">
+        <p14:creationId xmlns:p14="http://schemas.microsoft.com/office/powerpoint/2010/main" val="2636239184"/>
+      </p:ext>
+    </p:extLst>
+  </p:cSld>
+  <p:clrMapOvr>
+    <a:masterClrMapping/>
+  </p:clrMapOvr>
+</p:sld>
+</file>
+
+<file path=ppt/slides/slide18.xml><?xml version="1.0" encoding="utf-8"?>
+<p:sld xmlns:a="http://schemas.openxmlformats.org/drawingml/2006/main" xmlns:r="http://schemas.openxmlformats.org/officeDocument/2006/relationships" xmlns:p="http://schemas.openxmlformats.org/presentationml/2006/main">
+  <p:cSld>
+    <p:spTree>
+      <p:nvGrpSpPr>
+        <p:cNvPr id="1" name="">
+          <a:extLst>
+            <a:ext uri="{FF2B5EF4-FFF2-40B4-BE49-F238E27FC236}">
+              <a16:creationId xmlns:a16="http://schemas.microsoft.com/office/drawing/2014/main" id="{5F17A97E-3EEF-22AD-3195-B7C3B735848B}"/>
+            </a:ext>
+          </a:extLst>
+        </p:cNvPr>
+        <p:cNvGrpSpPr/>
+        <p:nvPr/>
+      </p:nvGrpSpPr>
+      <p:grpSpPr>
+        <a:xfrm>
+          <a:off x="0" y="0"/>
+          <a:ext cx="0" cy="0"/>
+          <a:chOff x="0" y="0"/>
+          <a:chExt cx="0" cy="0"/>
+        </a:xfrm>
+      </p:grpSpPr>
+      <p:sp>
+        <p:nvSpPr>
+          <p:cNvPr id="2" name="Title 1">
+            <a:extLst>
+              <a:ext uri="{FF2B5EF4-FFF2-40B4-BE49-F238E27FC236}">
+                <a16:creationId xmlns:a16="http://schemas.microsoft.com/office/drawing/2014/main" id="{82987371-0D0D-5C34-DBC3-9AD34ACFB666}"/>
+              </a:ext>
+            </a:extLst>
+          </p:cNvPr>
+          <p:cNvSpPr>
+            <a:spLocks noGrp="1"/>
+          </p:cNvSpPr>
+          <p:nvPr>
+            <p:ph type="title"/>
+          </p:nvPr>
+        </p:nvSpPr>
+        <p:spPr>
+          <a:xfrm>
+            <a:off x="3427462" y="-55282"/>
+            <a:ext cx="8753475" cy="1325563"/>
+          </a:xfrm>
+        </p:spPr>
+        <p:txBody>
+          <a:bodyPr anchor="ctr">
+            <a:normAutofit/>
+          </a:bodyPr>
+          <a:lstStyle/>
+          <a:p>
+            <a:r>
+              <a:rPr lang="en-GB" dirty="0"/>
+              <a:t>K-Core Example - Word Cloud</a:t>
+            </a:r>
+            <a:endParaRPr lang="en-IL" dirty="0"/>
+          </a:p>
+        </p:txBody>
+      </p:sp>
+      <p:sp>
+        <p:nvSpPr>
+          <p:cNvPr id="4" name="Slide Number Placeholder 3">
+            <a:extLst>
+              <a:ext uri="{FF2B5EF4-FFF2-40B4-BE49-F238E27FC236}">
+                <a16:creationId xmlns:a16="http://schemas.microsoft.com/office/drawing/2014/main" id="{9B744270-F2B8-1F26-07D1-8CFF4D03A0AA}"/>
+              </a:ext>
+            </a:extLst>
+          </p:cNvPr>
+          <p:cNvSpPr>
+            <a:spLocks noGrp="1"/>
+          </p:cNvSpPr>
+          <p:nvPr>
+            <p:ph type="sldNum" sz="quarter" idx="12"/>
+          </p:nvPr>
+        </p:nvSpPr>
+        <p:spPr>
+          <a:xfrm>
+            <a:off x="11728704" y="6464649"/>
+            <a:ext cx="452233" cy="365125"/>
+          </a:xfrm>
+        </p:spPr>
+        <p:txBody>
+          <a:bodyPr anchor="ctr">
+            <a:normAutofit/>
+          </a:bodyPr>
+          <a:lstStyle/>
+          <a:p>
+            <a:pPr>
+              <a:spcAft>
+                <a:spcPts val="600"/>
+              </a:spcAft>
+            </a:pPr>
+            <a:fld id="{E6AB8EDD-9EF2-4633-A1C2-4D908C1019B4}" type="slidenum">
+              <a:rPr lang="he-IL" smtClean="0"/>
+              <a:pPr>
+                <a:spcAft>
+                  <a:spcPts val="600"/>
+                </a:spcAft>
+              </a:pPr>
+              <a:t>18</a:t>
+            </a:fld>
+            <a:endParaRPr lang="he-IL"/>
+          </a:p>
+        </p:txBody>
+      </p:sp>
+      <p:pic>
+        <p:nvPicPr>
+          <p:cNvPr id="6" name="Picture 5">
+            <a:extLst>
+              <a:ext uri="{FF2B5EF4-FFF2-40B4-BE49-F238E27FC236}">
+                <a16:creationId xmlns:a16="http://schemas.microsoft.com/office/drawing/2014/main" id="{696B63D4-DBEB-D4C9-9C41-EA06F53EBB94}"/>
+              </a:ext>
+            </a:extLst>
+          </p:cNvPr>
+          <p:cNvPicPr>
+            <a:picLocks noChangeAspect="1"/>
+          </p:cNvPicPr>
+          <p:nvPr/>
+        </p:nvPicPr>
+        <p:blipFill>
+          <a:blip r:embed="rId2"/>
+          <a:stretch>
+            <a:fillRect/>
+          </a:stretch>
+        </p:blipFill>
+        <p:spPr>
+          <a:xfrm>
+            <a:off x="1529326" y="3883018"/>
+            <a:ext cx="4664931" cy="2520000"/>
+          </a:xfrm>
+          <a:prstGeom prst="rect">
+            <a:avLst/>
+          </a:prstGeom>
+        </p:spPr>
+      </p:pic>
+      <p:sp>
+        <p:nvSpPr>
+          <p:cNvPr id="8" name="TextBox 7">
+            <a:extLst>
+              <a:ext uri="{FF2B5EF4-FFF2-40B4-BE49-F238E27FC236}">
+                <a16:creationId xmlns:a16="http://schemas.microsoft.com/office/drawing/2014/main" id="{365D565B-4429-F136-7A4F-077C66991C54}"/>
+              </a:ext>
+            </a:extLst>
+          </p:cNvPr>
+          <p:cNvSpPr txBox="1"/>
+          <p:nvPr/>
+        </p:nvSpPr>
+        <p:spPr>
+          <a:xfrm>
+            <a:off x="1529326" y="6403018"/>
+            <a:ext cx="4566674" cy="307777"/>
+          </a:xfrm>
+          <a:prstGeom prst="rect">
+            <a:avLst/>
+          </a:prstGeom>
+          <a:noFill/>
+        </p:spPr>
+        <p:txBody>
+          <a:bodyPr wrap="square">
+            <a:spAutoFit/>
+          </a:bodyPr>
+          <a:lstStyle/>
+          <a:p>
+            <a:pPr algn="ctr"/>
+            <a:r>
+              <a:rPr lang="en-GB" sz="1400" dirty="0"/>
+              <a:t>Account: </a:t>
+            </a:r>
+            <a:r>
+              <a:rPr lang="en-IL" sz="1400" dirty="0"/>
+              <a:t>4356e554e26d3b89f45ecfdee41cc2bd57a86bf2bb</a:t>
+            </a:r>
+          </a:p>
+        </p:txBody>
+      </p:sp>
+      <p:pic>
+        <p:nvPicPr>
+          <p:cNvPr id="10" name="Picture 9">
+            <a:extLst>
+              <a:ext uri="{FF2B5EF4-FFF2-40B4-BE49-F238E27FC236}">
+                <a16:creationId xmlns:a16="http://schemas.microsoft.com/office/drawing/2014/main" id="{CE6A9B18-3112-DC1E-E49B-B42498155688}"/>
+              </a:ext>
+            </a:extLst>
+          </p:cNvPr>
+          <p:cNvPicPr>
+            <a:picLocks noChangeAspect="1"/>
+          </p:cNvPicPr>
+          <p:nvPr/>
+        </p:nvPicPr>
+        <p:blipFill>
+          <a:blip r:embed="rId3"/>
+          <a:stretch>
+            <a:fillRect/>
+          </a:stretch>
+        </p:blipFill>
+        <p:spPr>
+          <a:xfrm>
+            <a:off x="7005199" y="2502945"/>
+            <a:ext cx="4664932" cy="2520000"/>
+          </a:xfrm>
+          <a:prstGeom prst="rect">
+            <a:avLst/>
+          </a:prstGeom>
+        </p:spPr>
+      </p:pic>
+      <p:sp>
+        <p:nvSpPr>
+          <p:cNvPr id="11" name="TextBox 10">
+            <a:extLst>
+              <a:ext uri="{FF2B5EF4-FFF2-40B4-BE49-F238E27FC236}">
+                <a16:creationId xmlns:a16="http://schemas.microsoft.com/office/drawing/2014/main" id="{2AA3FB6A-80C6-BE5D-4AE3-989114FE7CB2}"/>
+              </a:ext>
+            </a:extLst>
+          </p:cNvPr>
+          <p:cNvSpPr txBox="1"/>
+          <p:nvPr/>
+        </p:nvSpPr>
+        <p:spPr>
+          <a:xfrm>
+            <a:off x="7109012" y="4981435"/>
+            <a:ext cx="4561119" cy="307777"/>
+          </a:xfrm>
+          <a:prstGeom prst="rect">
+            <a:avLst/>
+          </a:prstGeom>
+          <a:noFill/>
+        </p:spPr>
+        <p:txBody>
+          <a:bodyPr wrap="square">
+            <a:spAutoFit/>
+          </a:bodyPr>
+          <a:lstStyle/>
+          <a:p>
+            <a:pPr algn="ctr"/>
+            <a:r>
+              <a:rPr lang="en-GB" sz="1400" dirty="0"/>
+              <a:t>Account: </a:t>
+            </a:r>
+            <a:r>
+              <a:rPr lang="en-IL" sz="1400" dirty="0"/>
+              <a:t>71cc57155d061d447c2c65756c7dfd6873e403a097</a:t>
+            </a:r>
+          </a:p>
+        </p:txBody>
+      </p:sp>
+      <p:pic>
+        <p:nvPicPr>
+          <p:cNvPr id="12" name="Picture 11">
+            <a:extLst>
+              <a:ext uri="{FF2B5EF4-FFF2-40B4-BE49-F238E27FC236}">
+                <a16:creationId xmlns:a16="http://schemas.microsoft.com/office/drawing/2014/main" id="{ABCB8A62-3788-74C2-C02D-A15EE6DA348A}"/>
+              </a:ext>
+            </a:extLst>
+          </p:cNvPr>
+          <p:cNvPicPr>
+            <a:picLocks noChangeAspect="1"/>
+          </p:cNvPicPr>
+          <p:nvPr/>
+        </p:nvPicPr>
+        <p:blipFill>
+          <a:blip r:embed="rId4"/>
+          <a:stretch>
+            <a:fillRect/>
+          </a:stretch>
+        </p:blipFill>
+        <p:spPr>
+          <a:xfrm>
+            <a:off x="1529326" y="909000"/>
+            <a:ext cx="4664931" cy="2520000"/>
+          </a:xfrm>
+          <a:prstGeom prst="rect">
+            <a:avLst/>
+          </a:prstGeom>
+        </p:spPr>
+      </p:pic>
+      <p:sp>
+        <p:nvSpPr>
+          <p:cNvPr id="16" name="TextBox 15">
+            <a:extLst>
+              <a:ext uri="{FF2B5EF4-FFF2-40B4-BE49-F238E27FC236}">
+                <a16:creationId xmlns:a16="http://schemas.microsoft.com/office/drawing/2014/main" id="{F479A7F8-7A03-F3B0-6624-B225A91D0D7C}"/>
+              </a:ext>
+            </a:extLst>
+          </p:cNvPr>
+          <p:cNvSpPr txBox="1"/>
+          <p:nvPr/>
+        </p:nvSpPr>
+        <p:spPr>
+          <a:xfrm>
+            <a:off x="1529326" y="3382717"/>
+            <a:ext cx="4664931" cy="307777"/>
+          </a:xfrm>
+          <a:prstGeom prst="rect">
+            <a:avLst/>
+          </a:prstGeom>
+          <a:noFill/>
+        </p:spPr>
+        <p:txBody>
+          <a:bodyPr wrap="square">
+            <a:spAutoFit/>
+          </a:bodyPr>
+          <a:lstStyle/>
+          <a:p>
+            <a:pPr algn="ctr"/>
+            <a:r>
+              <a:rPr lang="en-GB" sz="1400" dirty="0"/>
+              <a:t>Account: </a:t>
+            </a:r>
+            <a:r>
+              <a:rPr lang="en-IL" sz="1400" dirty="0"/>
+              <a:t>712125a6c1b43b2c54bfbc73386d54d6d35a3f9d0f</a:t>
+            </a:r>
+          </a:p>
+        </p:txBody>
+      </p:sp>
+    </p:spTree>
+    <p:extLst>
+      <p:ext uri="{BB962C8B-B14F-4D97-AF65-F5344CB8AC3E}">
+        <p14:creationId xmlns:p14="http://schemas.microsoft.com/office/powerpoint/2010/main" val="1084040124"/>
+      </p:ext>
+    </p:extLst>
+  </p:cSld>
+  <p:clrMapOvr>
+    <a:masterClrMapping/>
+  </p:clrMapOvr>
+</p:sld>
+</file>
+
+<file path=ppt/slides/slide19.xml><?xml version="1.0" encoding="utf-8"?>
+<p:sld xmlns:a="http://schemas.openxmlformats.org/drawingml/2006/main" xmlns:r="http://schemas.openxmlformats.org/officeDocument/2006/relationships" xmlns:p="http://schemas.openxmlformats.org/presentationml/2006/main" show="0">
+  <p:cSld>
+    <p:spTree>
+      <p:nvGrpSpPr>
+        <p:cNvPr id="1" name="">
+          <a:extLst>
+            <a:ext uri="{FF2B5EF4-FFF2-40B4-BE49-F238E27FC236}">
+              <a16:creationId xmlns:a16="http://schemas.microsoft.com/office/drawing/2014/main" id="{4F1D631C-0474-31A2-8F4A-253AE6BB3179}"/>
+            </a:ext>
+          </a:extLst>
+        </p:cNvPr>
+        <p:cNvGrpSpPr/>
+        <p:nvPr/>
+      </p:nvGrpSpPr>
+      <p:grpSpPr>
+        <a:xfrm>
+          <a:off x="0" y="0"/>
+          <a:ext cx="0" cy="0"/>
+          <a:chOff x="0" y="0"/>
+          <a:chExt cx="0" cy="0"/>
+        </a:xfrm>
+      </p:grpSpPr>
+      <p:sp>
+        <p:nvSpPr>
+          <p:cNvPr id="2" name="Title 1">
+            <a:extLst>
+              <a:ext uri="{FF2B5EF4-FFF2-40B4-BE49-F238E27FC236}">
+                <a16:creationId xmlns:a16="http://schemas.microsoft.com/office/drawing/2014/main" id="{A3F3302A-DA36-40AE-FEB5-58196BE76355}"/>
+              </a:ext>
+            </a:extLst>
+          </p:cNvPr>
+          <p:cNvSpPr>
+            <a:spLocks noGrp="1"/>
+          </p:cNvSpPr>
+          <p:nvPr>
+            <p:ph type="title"/>
+          </p:nvPr>
+        </p:nvSpPr>
+        <p:spPr>
+          <a:xfrm>
+            <a:off x="3427462" y="-55282"/>
+            <a:ext cx="8753475" cy="1325563"/>
+          </a:xfrm>
+        </p:spPr>
+        <p:txBody>
+          <a:bodyPr anchor="ctr">
+            <a:normAutofit/>
+          </a:bodyPr>
+          <a:lstStyle/>
+          <a:p>
+            <a:r>
+              <a:rPr lang="en-GB" dirty="0"/>
+              <a:t>K-Core Example – Top Posts</a:t>
+            </a:r>
+            <a:endParaRPr lang="en-IL" dirty="0"/>
+          </a:p>
+        </p:txBody>
+      </p:sp>
+      <p:sp>
+        <p:nvSpPr>
+          <p:cNvPr id="4" name="Slide Number Placeholder 3">
+            <a:extLst>
+              <a:ext uri="{FF2B5EF4-FFF2-40B4-BE49-F238E27FC236}">
+                <a16:creationId xmlns:a16="http://schemas.microsoft.com/office/drawing/2014/main" id="{9DD7C468-10F2-3E81-3E4F-33E979828858}"/>
+              </a:ext>
+            </a:extLst>
+          </p:cNvPr>
+          <p:cNvSpPr>
+            <a:spLocks noGrp="1"/>
+          </p:cNvSpPr>
+          <p:nvPr>
+            <p:ph type="sldNum" sz="quarter" idx="12"/>
+          </p:nvPr>
+        </p:nvSpPr>
+        <p:spPr>
+          <a:xfrm>
+            <a:off x="11728704" y="6464649"/>
+            <a:ext cx="452233" cy="365125"/>
+          </a:xfrm>
+        </p:spPr>
+        <p:txBody>
+          <a:bodyPr anchor="ctr">
+            <a:normAutofit/>
+          </a:bodyPr>
+          <a:lstStyle/>
+          <a:p>
+            <a:pPr>
+              <a:spcAft>
+                <a:spcPts val="600"/>
+              </a:spcAft>
+            </a:pPr>
+            <a:fld id="{E6AB8EDD-9EF2-4633-A1C2-4D908C1019B4}" type="slidenum">
+              <a:rPr lang="he-IL" smtClean="0"/>
+              <a:pPr>
+                <a:spcAft>
+                  <a:spcPts val="600"/>
+                </a:spcAft>
+              </a:pPr>
+              <a:t>19</a:t>
+            </a:fld>
+            <a:endParaRPr lang="he-IL"/>
+          </a:p>
+        </p:txBody>
+      </p:sp>
+      <p:pic>
+        <p:nvPicPr>
+          <p:cNvPr id="5" name="Picture 4">
+            <a:extLst>
+              <a:ext uri="{FF2B5EF4-FFF2-40B4-BE49-F238E27FC236}">
+                <a16:creationId xmlns:a16="http://schemas.microsoft.com/office/drawing/2014/main" id="{74F5A9A0-E4E7-9D8E-1B78-578AEA1FAECD}"/>
+              </a:ext>
+            </a:extLst>
+          </p:cNvPr>
+          <p:cNvPicPr>
+            <a:picLocks noChangeAspect="1"/>
+          </p:cNvPicPr>
+          <p:nvPr/>
+        </p:nvPicPr>
+        <p:blipFill>
+          <a:blip r:embed="rId2"/>
+          <a:stretch>
+            <a:fillRect/>
+          </a:stretch>
+        </p:blipFill>
+        <p:spPr>
+          <a:xfrm>
+            <a:off x="1930567" y="931251"/>
+            <a:ext cx="8941869" cy="5304983"/>
+          </a:xfrm>
+          <a:prstGeom prst="rect">
+            <a:avLst/>
+          </a:prstGeom>
+        </p:spPr>
+      </p:pic>
+    </p:spTree>
+    <p:extLst>
+      <p:ext uri="{BB962C8B-B14F-4D97-AF65-F5344CB8AC3E}">
+        <p14:creationId xmlns:p14="http://schemas.microsoft.com/office/powerpoint/2010/main" val="1919473928"/>
+      </p:ext>
+    </p:extLst>
+  </p:cSld>
+  <p:clrMapOvr>
+    <a:masterClrMapping/>
+  </p:clrMapOvr>
+</p:sld>
+</file>
+
+<file path=ppt/slides/slide2.xml><?xml version="1.0" encoding="utf-8"?>
+<p:sld xmlns:a="http://schemas.openxmlformats.org/drawingml/2006/main" xmlns:r="http://schemas.openxmlformats.org/officeDocument/2006/relationships" xmlns:p="http://schemas.openxmlformats.org/presentationml/2006/main">
+  <p:cSld>
+    <p:spTree>
+      <p:nvGrpSpPr>
+        <p:cNvPr id="1" name="">
+          <a:extLst>
+            <a:ext uri="{FF2B5EF4-FFF2-40B4-BE49-F238E27FC236}">
+              <a16:creationId xmlns:a16="http://schemas.microsoft.com/office/drawing/2014/main" id="{21B25F04-2075-5640-5DEC-3A750362777B}"/>
+            </a:ext>
+          </a:extLst>
+        </p:cNvPr>
+        <p:cNvGrpSpPr/>
+        <p:nvPr/>
+      </p:nvGrpSpPr>
+      <p:grpSpPr>
+        <a:xfrm>
+          <a:off x="0" y="0"/>
+          <a:ext cx="0" cy="0"/>
+          <a:chOff x="0" y="0"/>
+          <a:chExt cx="0" cy="0"/>
+        </a:xfrm>
+      </p:grpSpPr>
+      <p:sp>
+        <p:nvSpPr>
+          <p:cNvPr id="2" name="Title 1">
+            <a:extLst>
+              <a:ext uri="{FF2B5EF4-FFF2-40B4-BE49-F238E27FC236}">
+                <a16:creationId xmlns:a16="http://schemas.microsoft.com/office/drawing/2014/main" id="{754707E5-B275-6452-62FB-2B98BD269FB1}"/>
+              </a:ext>
+            </a:extLst>
+          </p:cNvPr>
+          <p:cNvSpPr>
+            <a:spLocks noGrp="1"/>
+          </p:cNvSpPr>
+          <p:nvPr>
+            <p:ph type="title"/>
+          </p:nvPr>
+        </p:nvSpPr>
+        <p:spPr>
+          <a:xfrm>
+            <a:off x="3072268" y="401637"/>
+            <a:ext cx="8753475" cy="1325563"/>
+          </a:xfrm>
+        </p:spPr>
+        <p:txBody>
+          <a:bodyPr anchor="ctr">
+            <a:normAutofit/>
+          </a:bodyPr>
+          <a:lstStyle/>
+          <a:p>
+            <a:r>
+              <a:rPr lang="en-IL" dirty="0"/>
+              <a:t>Motivation</a:t>
+            </a:r>
+          </a:p>
+        </p:txBody>
+      </p:sp>
+      <p:sp>
+        <p:nvSpPr>
+          <p:cNvPr id="3" name="Content Placeholder 2">
+            <a:extLst>
+              <a:ext uri="{FF2B5EF4-FFF2-40B4-BE49-F238E27FC236}">
+                <a16:creationId xmlns:a16="http://schemas.microsoft.com/office/drawing/2014/main" id="{DFC11588-A0A9-88D4-64DC-E215A71D589A}"/>
+              </a:ext>
+            </a:extLst>
+          </p:cNvPr>
+          <p:cNvSpPr>
+            <a:spLocks noGrp="1"/>
+          </p:cNvSpPr>
+          <p:nvPr>
+            <p:ph sz="half" idx="1"/>
+          </p:nvPr>
+        </p:nvSpPr>
+        <p:spPr>
+          <a:xfrm>
+            <a:off x="1236990" y="1821101"/>
+            <a:ext cx="5631057" cy="4749032"/>
+          </a:xfrm>
+        </p:spPr>
+        <p:txBody>
+          <a:bodyPr>
+            <a:noAutofit/>
+          </a:bodyPr>
+          <a:lstStyle/>
+          <a:p>
+            <a:r>
+              <a:rPr lang="en-IL" sz="3000" dirty="0"/>
+              <a:t>Social media platforms have become central spaces for public discourse</a:t>
+            </a:r>
+            <a:r>
+              <a:rPr lang="en-US" sz="3000" dirty="0"/>
+              <a:t>.</a:t>
+            </a:r>
+            <a:endParaRPr lang="en-IL" sz="3000" dirty="0"/>
+          </a:p>
+          <a:p>
+            <a:r>
+              <a:rPr lang="en-US" sz="3000" dirty="0"/>
+              <a:t>The </a:t>
+            </a:r>
+            <a:r>
+              <a:rPr lang="en-IL" sz="3000" dirty="0"/>
+              <a:t>platforms</a:t>
+            </a:r>
+            <a:r>
+              <a:rPr lang="en-US" sz="3000" dirty="0"/>
+              <a:t>’</a:t>
+            </a:r>
+            <a:r>
+              <a:rPr lang="en-IL" sz="3000" dirty="0"/>
+              <a:t> openness enables malicious actors</a:t>
+            </a:r>
+            <a:r>
+              <a:rPr lang="en-US" sz="3000" dirty="0"/>
+              <a:t> </a:t>
+            </a:r>
+            <a:r>
+              <a:rPr lang="en-IL" sz="3000" dirty="0"/>
+              <a:t>to manipulate online conversations.</a:t>
+            </a:r>
+          </a:p>
+          <a:p>
+            <a:r>
+              <a:rPr lang="en-GB" sz="3000" dirty="0"/>
+              <a:t>The </a:t>
+            </a:r>
+            <a:r>
+              <a:rPr lang="en-IL" sz="3000" dirty="0"/>
+              <a:t>malicious actors</a:t>
+            </a:r>
+            <a:r>
+              <a:rPr lang="en-US" sz="3000" dirty="0"/>
+              <a:t> </a:t>
+            </a:r>
+            <a:r>
+              <a:rPr lang="en-GB" sz="3000" dirty="0"/>
+              <a:t>preform</a:t>
+            </a:r>
+            <a:r>
+              <a:rPr lang="en-IL" sz="3000" dirty="0"/>
+              <a:t> </a:t>
+            </a:r>
+            <a:r>
+              <a:rPr lang="en-GB" sz="3000" dirty="0"/>
+              <a:t>information operations (IO)</a:t>
+            </a:r>
+            <a:r>
+              <a:rPr lang="en-IL" sz="3000" dirty="0"/>
+              <a:t> </a:t>
+            </a:r>
+            <a:r>
+              <a:rPr lang="en-GB" sz="3000" dirty="0"/>
+              <a:t>threatening </a:t>
+            </a:r>
+            <a:r>
+              <a:rPr lang="en-IL" sz="3000" dirty="0"/>
+              <a:t>democratic processes, public trust, and societal cohesion.</a:t>
+            </a:r>
+          </a:p>
+        </p:txBody>
+      </p:sp>
+      <p:pic>
+        <p:nvPicPr>
+          <p:cNvPr id="8" name="Picture 7">
+            <a:extLst>
+              <a:ext uri="{FF2B5EF4-FFF2-40B4-BE49-F238E27FC236}">
+                <a16:creationId xmlns:a16="http://schemas.microsoft.com/office/drawing/2014/main" id="{4D1C13A7-1923-2D9F-B551-824B61A989A1}"/>
+              </a:ext>
+            </a:extLst>
+          </p:cNvPr>
+          <p:cNvPicPr>
+            <a:picLocks noChangeAspect="1"/>
+          </p:cNvPicPr>
+          <p:nvPr/>
+        </p:nvPicPr>
+        <p:blipFill>
+          <a:blip r:embed="rId2"/>
+          <a:stretch>
+            <a:fillRect/>
+          </a:stretch>
+        </p:blipFill>
+        <p:spPr>
+          <a:xfrm>
+            <a:off x="6868047" y="1546558"/>
+            <a:ext cx="5181600" cy="4657017"/>
+          </a:xfrm>
+          <a:prstGeom prst="rect">
+            <a:avLst/>
+          </a:prstGeom>
+          <a:noFill/>
+        </p:spPr>
+      </p:pic>
+      <p:sp>
+        <p:nvSpPr>
+          <p:cNvPr id="4" name="Slide Number Placeholder 3">
+            <a:extLst>
+              <a:ext uri="{FF2B5EF4-FFF2-40B4-BE49-F238E27FC236}">
+                <a16:creationId xmlns:a16="http://schemas.microsoft.com/office/drawing/2014/main" id="{C0B5F257-DB4A-FAD3-2097-E17D9C5B1528}"/>
+              </a:ext>
+            </a:extLst>
+          </p:cNvPr>
+          <p:cNvSpPr>
+            <a:spLocks noGrp="1"/>
+          </p:cNvSpPr>
+          <p:nvPr>
+            <p:ph type="sldNum" sz="quarter" idx="12"/>
+          </p:nvPr>
+        </p:nvSpPr>
+        <p:spPr>
+          <a:xfrm>
+            <a:off x="11728704" y="6464649"/>
+            <a:ext cx="452233" cy="365125"/>
+          </a:xfrm>
+        </p:spPr>
+        <p:txBody>
+          <a:bodyPr anchor="ctr">
+            <a:normAutofit/>
+          </a:bodyPr>
+          <a:lstStyle/>
+          <a:p>
+            <a:pPr>
+              <a:spcAft>
+                <a:spcPts val="600"/>
+              </a:spcAft>
+            </a:pPr>
+            <a:fld id="{E6AB8EDD-9EF2-4633-A1C2-4D908C1019B4}" type="slidenum">
+              <a:rPr lang="he-IL" smtClean="0"/>
+              <a:pPr>
+                <a:spcAft>
+                  <a:spcPts val="600"/>
+                </a:spcAft>
+              </a:pPr>
+              <a:t>2</a:t>
+            </a:fld>
+            <a:endParaRPr lang="he-IL"/>
+          </a:p>
+        </p:txBody>
+      </p:sp>
+    </p:spTree>
+    <p:extLst>
+      <p:ext uri="{BB962C8B-B14F-4D97-AF65-F5344CB8AC3E}">
+        <p14:creationId xmlns:p14="http://schemas.microsoft.com/office/powerpoint/2010/main" val="3988943813"/>
+      </p:ext>
+    </p:extLst>
+  </p:cSld>
+  <p:clrMapOvr>
+    <a:masterClrMapping/>
+  </p:clrMapOvr>
+</p:sld>
+</file>
+
+<file path=ppt/slides/slide20.xml><?xml version="1.0" encoding="utf-8"?>
+<p:sld xmlns:a="http://schemas.openxmlformats.org/drawingml/2006/main" xmlns:r="http://schemas.openxmlformats.org/officeDocument/2006/relationships" xmlns:p="http://schemas.openxmlformats.org/presentationml/2006/main" show="0">
+  <p:cSld>
+    <p:spTree>
+      <p:nvGrpSpPr>
+        <p:cNvPr id="1" name="">
+          <a:extLst>
+            <a:ext uri="{FF2B5EF4-FFF2-40B4-BE49-F238E27FC236}">
+              <a16:creationId xmlns:a16="http://schemas.microsoft.com/office/drawing/2014/main" id="{E4F1B31F-78F0-7858-AE46-3A6AB43B795D}"/>
+            </a:ext>
+          </a:extLst>
+        </p:cNvPr>
+        <p:cNvGrpSpPr/>
+        <p:nvPr/>
+      </p:nvGrpSpPr>
+      <p:grpSpPr>
+        <a:xfrm>
+          <a:off x="0" y="0"/>
+          <a:ext cx="0" cy="0"/>
+          <a:chOff x="0" y="0"/>
+          <a:chExt cx="0" cy="0"/>
+        </a:xfrm>
+      </p:grpSpPr>
+      <p:sp>
+        <p:nvSpPr>
+          <p:cNvPr id="2" name="Title 1">
+            <a:extLst>
+              <a:ext uri="{FF2B5EF4-FFF2-40B4-BE49-F238E27FC236}">
+                <a16:creationId xmlns:a16="http://schemas.microsoft.com/office/drawing/2014/main" id="{1D1DE87F-7930-4BE1-329A-4F3A5152B216}"/>
+              </a:ext>
+            </a:extLst>
+          </p:cNvPr>
+          <p:cNvSpPr>
+            <a:spLocks noGrp="1"/>
+          </p:cNvSpPr>
+          <p:nvPr>
+            <p:ph type="title"/>
+          </p:nvPr>
+        </p:nvSpPr>
+        <p:spPr>
+          <a:xfrm>
+            <a:off x="3427462" y="-55282"/>
+            <a:ext cx="8753475" cy="1325563"/>
+          </a:xfrm>
+        </p:spPr>
+        <p:txBody>
+          <a:bodyPr anchor="ctr">
+            <a:normAutofit/>
+          </a:bodyPr>
+          <a:lstStyle/>
+          <a:p>
+            <a:r>
+              <a:rPr lang="en-GB" dirty="0"/>
+              <a:t>K-Core Example – Top Posts</a:t>
+            </a:r>
+            <a:endParaRPr lang="en-IL" dirty="0"/>
+          </a:p>
+        </p:txBody>
+      </p:sp>
+      <p:sp>
+        <p:nvSpPr>
+          <p:cNvPr id="4" name="Slide Number Placeholder 3">
+            <a:extLst>
+              <a:ext uri="{FF2B5EF4-FFF2-40B4-BE49-F238E27FC236}">
+                <a16:creationId xmlns:a16="http://schemas.microsoft.com/office/drawing/2014/main" id="{629F2D2A-63D8-B77A-FF2E-BBC8A572AA2A}"/>
+              </a:ext>
+            </a:extLst>
+          </p:cNvPr>
+          <p:cNvSpPr>
+            <a:spLocks noGrp="1"/>
+          </p:cNvSpPr>
+          <p:nvPr>
+            <p:ph type="sldNum" sz="quarter" idx="12"/>
+          </p:nvPr>
+        </p:nvSpPr>
+        <p:spPr>
+          <a:xfrm>
+            <a:off x="11728704" y="6464649"/>
+            <a:ext cx="452233" cy="365125"/>
+          </a:xfrm>
+        </p:spPr>
+        <p:txBody>
+          <a:bodyPr anchor="ctr">
+            <a:normAutofit/>
+          </a:bodyPr>
+          <a:lstStyle/>
+          <a:p>
+            <a:pPr>
+              <a:spcAft>
+                <a:spcPts val="600"/>
+              </a:spcAft>
+            </a:pPr>
+            <a:fld id="{E6AB8EDD-9EF2-4633-A1C2-4D908C1019B4}" type="slidenum">
+              <a:rPr lang="he-IL" smtClean="0"/>
+              <a:pPr>
+                <a:spcAft>
+                  <a:spcPts val="600"/>
+                </a:spcAft>
+              </a:pPr>
+              <a:t>20</a:t>
+            </a:fld>
+            <a:endParaRPr lang="he-IL"/>
+          </a:p>
+        </p:txBody>
+      </p:sp>
+      <p:pic>
+        <p:nvPicPr>
+          <p:cNvPr id="9" name="Picture 8">
+            <a:extLst>
+              <a:ext uri="{FF2B5EF4-FFF2-40B4-BE49-F238E27FC236}">
+                <a16:creationId xmlns:a16="http://schemas.microsoft.com/office/drawing/2014/main" id="{74FA35B5-148A-4935-0918-A1F0A76257E8}"/>
+              </a:ext>
+            </a:extLst>
+          </p:cNvPr>
+          <p:cNvPicPr>
+            <a:picLocks noChangeAspect="1"/>
+          </p:cNvPicPr>
+          <p:nvPr/>
+        </p:nvPicPr>
+        <p:blipFill>
+          <a:blip r:embed="rId2"/>
+          <a:stretch>
+            <a:fillRect/>
+          </a:stretch>
+        </p:blipFill>
+        <p:spPr>
+          <a:xfrm>
+            <a:off x="801849" y="870615"/>
+            <a:ext cx="10588302" cy="5462808"/>
+          </a:xfrm>
+          <a:prstGeom prst="rect">
+            <a:avLst/>
+          </a:prstGeom>
+        </p:spPr>
+      </p:pic>
+    </p:spTree>
+    <p:extLst>
+      <p:ext uri="{BB962C8B-B14F-4D97-AF65-F5344CB8AC3E}">
+        <p14:creationId xmlns:p14="http://schemas.microsoft.com/office/powerpoint/2010/main" val="3306335861"/>
+      </p:ext>
+    </p:extLst>
+  </p:cSld>
+  <p:clrMapOvr>
+    <a:masterClrMapping/>
+  </p:clrMapOvr>
+</p:sld>
+</file>
+
+<file path=ppt/slides/slide21.xml><?xml version="1.0" encoding="utf-8"?>
+<p:sld xmlns:a="http://schemas.openxmlformats.org/drawingml/2006/main" xmlns:r="http://schemas.openxmlformats.org/officeDocument/2006/relationships" xmlns:p="http://schemas.openxmlformats.org/presentationml/2006/main" show="0">
+  <p:cSld>
+    <p:spTree>
+      <p:nvGrpSpPr>
+        <p:cNvPr id="1" name="">
+          <a:extLst>
+            <a:ext uri="{FF2B5EF4-FFF2-40B4-BE49-F238E27FC236}">
+              <a16:creationId xmlns:a16="http://schemas.microsoft.com/office/drawing/2014/main" id="{FC57CEC8-F28B-AF96-D25C-C5077F7AD920}"/>
+            </a:ext>
+          </a:extLst>
+        </p:cNvPr>
+        <p:cNvGrpSpPr/>
+        <p:nvPr/>
+      </p:nvGrpSpPr>
+      <p:grpSpPr>
+        <a:xfrm>
+          <a:off x="0" y="0"/>
+          <a:ext cx="0" cy="0"/>
+          <a:chOff x="0" y="0"/>
+          <a:chExt cx="0" cy="0"/>
+        </a:xfrm>
+      </p:grpSpPr>
+      <p:sp>
+        <p:nvSpPr>
+          <p:cNvPr id="2" name="Title 1">
+            <a:extLst>
+              <a:ext uri="{FF2B5EF4-FFF2-40B4-BE49-F238E27FC236}">
+                <a16:creationId xmlns:a16="http://schemas.microsoft.com/office/drawing/2014/main" id="{7F3677C7-2976-BAF7-7BC0-B94298F56216}"/>
+              </a:ext>
+            </a:extLst>
+          </p:cNvPr>
+          <p:cNvSpPr>
+            <a:spLocks noGrp="1"/>
+          </p:cNvSpPr>
+          <p:nvPr>
+            <p:ph type="title"/>
+          </p:nvPr>
+        </p:nvSpPr>
+        <p:spPr>
+          <a:xfrm>
+            <a:off x="3427462" y="-55282"/>
+            <a:ext cx="8753475" cy="1325563"/>
+          </a:xfrm>
+        </p:spPr>
+        <p:txBody>
+          <a:bodyPr anchor="ctr">
+            <a:normAutofit/>
+          </a:bodyPr>
+          <a:lstStyle/>
+          <a:p>
+            <a:r>
+              <a:rPr lang="en-GB" dirty="0"/>
+              <a:t>K-Core Example – Top Posts</a:t>
+            </a:r>
+            <a:endParaRPr lang="en-IL" dirty="0"/>
+          </a:p>
+        </p:txBody>
+      </p:sp>
+      <p:sp>
+        <p:nvSpPr>
+          <p:cNvPr id="4" name="Slide Number Placeholder 3">
+            <a:extLst>
+              <a:ext uri="{FF2B5EF4-FFF2-40B4-BE49-F238E27FC236}">
+                <a16:creationId xmlns:a16="http://schemas.microsoft.com/office/drawing/2014/main" id="{A4ACD51B-F403-C5B4-93EF-0481AFDB3BE6}"/>
+              </a:ext>
+            </a:extLst>
+          </p:cNvPr>
+          <p:cNvSpPr>
+            <a:spLocks noGrp="1"/>
+          </p:cNvSpPr>
+          <p:nvPr>
+            <p:ph type="sldNum" sz="quarter" idx="12"/>
+          </p:nvPr>
+        </p:nvSpPr>
+        <p:spPr>
+          <a:xfrm>
+            <a:off x="11728704" y="6464649"/>
+            <a:ext cx="452233" cy="365125"/>
+          </a:xfrm>
+        </p:spPr>
+        <p:txBody>
+          <a:bodyPr anchor="ctr">
+            <a:normAutofit/>
+          </a:bodyPr>
+          <a:lstStyle/>
+          <a:p>
+            <a:pPr>
+              <a:spcAft>
+                <a:spcPts val="600"/>
+              </a:spcAft>
+            </a:pPr>
+            <a:fld id="{E6AB8EDD-9EF2-4633-A1C2-4D908C1019B4}" type="slidenum">
+              <a:rPr lang="he-IL" smtClean="0"/>
+              <a:pPr>
+                <a:spcAft>
+                  <a:spcPts val="600"/>
+                </a:spcAft>
+              </a:pPr>
+              <a:t>21</a:t>
+            </a:fld>
+            <a:endParaRPr lang="he-IL"/>
+          </a:p>
+        </p:txBody>
+      </p:sp>
+      <p:pic>
+        <p:nvPicPr>
+          <p:cNvPr id="5" name="Picture 4">
+            <a:extLst>
+              <a:ext uri="{FF2B5EF4-FFF2-40B4-BE49-F238E27FC236}">
+                <a16:creationId xmlns:a16="http://schemas.microsoft.com/office/drawing/2014/main" id="{BE02696E-EA6C-CB4E-05BF-C2B2F127F962}"/>
+              </a:ext>
+            </a:extLst>
+          </p:cNvPr>
+          <p:cNvPicPr>
+            <a:picLocks noChangeAspect="1"/>
+          </p:cNvPicPr>
+          <p:nvPr/>
+        </p:nvPicPr>
+        <p:blipFill>
+          <a:blip r:embed="rId2"/>
+          <a:stretch>
+            <a:fillRect/>
+          </a:stretch>
+        </p:blipFill>
+        <p:spPr>
+          <a:xfrm>
+            <a:off x="912064" y="1925054"/>
+            <a:ext cx="11083755" cy="3582270"/>
+          </a:xfrm>
+          <a:prstGeom prst="rect">
+            <a:avLst/>
+          </a:prstGeom>
+        </p:spPr>
+      </p:pic>
+    </p:spTree>
+    <p:extLst>
+      <p:ext uri="{BB962C8B-B14F-4D97-AF65-F5344CB8AC3E}">
+        <p14:creationId xmlns:p14="http://schemas.microsoft.com/office/powerpoint/2010/main" val="2089302828"/>
+      </p:ext>
+    </p:extLst>
+  </p:cSld>
+  <p:clrMapOvr>
+    <a:masterClrMapping/>
+  </p:clrMapOvr>
+</p:sld>
+</file>
+
+<file path=ppt/slides/slide22.xml><?xml version="1.0" encoding="utf-8"?>
+<p:sld xmlns:a="http://schemas.openxmlformats.org/drawingml/2006/main" xmlns:r="http://schemas.openxmlformats.org/officeDocument/2006/relationships" xmlns:p="http://schemas.openxmlformats.org/presentationml/2006/main">
+  <p:cSld>
+    <p:spTree>
+      <p:nvGrpSpPr>
+        <p:cNvPr id="1" name="">
+          <a:extLst>
+            <a:ext uri="{FF2B5EF4-FFF2-40B4-BE49-F238E27FC236}">
+              <a16:creationId xmlns:a16="http://schemas.microsoft.com/office/drawing/2014/main" id="{933D542A-F510-7C65-32F1-A544A7469ABC}"/>
+            </a:ext>
+          </a:extLst>
+        </p:cNvPr>
+        <p:cNvGrpSpPr/>
+        <p:nvPr/>
+      </p:nvGrpSpPr>
+      <p:grpSpPr>
+        <a:xfrm>
+          <a:off x="0" y="0"/>
+          <a:ext cx="0" cy="0"/>
+          <a:chOff x="0" y="0"/>
+          <a:chExt cx="0" cy="0"/>
+        </a:xfrm>
+      </p:grpSpPr>
+      <p:sp>
+        <p:nvSpPr>
+          <p:cNvPr id="2" name="Title 1">
+            <a:extLst>
+              <a:ext uri="{FF2B5EF4-FFF2-40B4-BE49-F238E27FC236}">
+                <a16:creationId xmlns:a16="http://schemas.microsoft.com/office/drawing/2014/main" id="{162BB102-22E0-0E06-AC02-410F9C668CFD}"/>
+              </a:ext>
+            </a:extLst>
+          </p:cNvPr>
+          <p:cNvSpPr>
+            <a:spLocks noGrp="1"/>
+          </p:cNvSpPr>
+          <p:nvPr>
+            <p:ph type="title"/>
+          </p:nvPr>
+        </p:nvSpPr>
+        <p:spPr>
+          <a:xfrm>
+            <a:off x="3072268" y="401637"/>
+            <a:ext cx="8753475" cy="1325563"/>
+          </a:xfrm>
+        </p:spPr>
+        <p:txBody>
+          <a:bodyPr anchor="ctr">
+            <a:normAutofit/>
+          </a:bodyPr>
+          <a:lstStyle/>
+          <a:p>
+            <a:r>
+              <a:rPr lang="en-GB" dirty="0"/>
+              <a:t>K-Core Example</a:t>
+            </a:r>
+            <a:endParaRPr lang="en-IL" dirty="0"/>
+          </a:p>
+        </p:txBody>
+      </p:sp>
+      <p:sp>
+        <p:nvSpPr>
+          <p:cNvPr id="3" name="Content Placeholder 2">
+            <a:extLst>
+              <a:ext uri="{FF2B5EF4-FFF2-40B4-BE49-F238E27FC236}">
+                <a16:creationId xmlns:a16="http://schemas.microsoft.com/office/drawing/2014/main" id="{D83BA1CA-6FD8-B53B-BA40-ABEF48638209}"/>
+              </a:ext>
+            </a:extLst>
+          </p:cNvPr>
+          <p:cNvSpPr>
+            <a:spLocks noGrp="1"/>
+          </p:cNvSpPr>
+          <p:nvPr>
+            <p:ph sz="half" idx="1"/>
+          </p:nvPr>
+        </p:nvSpPr>
+        <p:spPr>
+          <a:xfrm>
+            <a:off x="1236990" y="1821101"/>
+            <a:ext cx="10381269" cy="4749032"/>
+          </a:xfrm>
+        </p:spPr>
+        <p:txBody>
+          <a:bodyPr>
+            <a:noAutofit/>
+          </a:bodyPr>
+          <a:lstStyle/>
+          <a:p>
+            <a:pPr marL="0" indent="0">
+              <a:buNone/>
+            </a:pPr>
+            <a:r>
+              <a:rPr lang="en-IL" sz="2600" dirty="0"/>
+              <a:t>An LLM</a:t>
+            </a:r>
+            <a:r>
+              <a:rPr lang="en-GB" sz="2600" dirty="0"/>
+              <a:t> </a:t>
+            </a:r>
+            <a:r>
+              <a:rPr lang="en-GB" sz="1800" dirty="0"/>
+              <a:t>(</a:t>
+            </a:r>
+            <a:r>
+              <a:rPr lang="en-IL" sz="1800" dirty="0"/>
+              <a:t>OpenAI ChatGPT web interface</a:t>
+            </a:r>
+            <a:r>
+              <a:rPr lang="en-GB" sz="1800" dirty="0"/>
+              <a:t>)</a:t>
+            </a:r>
+            <a:r>
+              <a:rPr lang="en-IL" sz="1800" dirty="0"/>
+              <a:t> </a:t>
+            </a:r>
+            <a:r>
+              <a:rPr lang="en-IL" sz="2600" dirty="0"/>
+              <a:t>was provided with the top 10 posts from each account, ranked by TF-IDF score. The </a:t>
+            </a:r>
+            <a:r>
+              <a:rPr lang="en-GB" sz="2600" dirty="0"/>
+              <a:t>model</a:t>
+            </a:r>
+            <a:r>
+              <a:rPr lang="en-IL" sz="2600" dirty="0"/>
+              <a:t> identified the following patterns:</a:t>
+            </a:r>
+            <a:endParaRPr lang="en-GB" sz="2600" dirty="0"/>
+          </a:p>
+          <a:p>
+            <a:pPr marL="514350" indent="-514350">
+              <a:buAutoNum type="arabicPeriod"/>
+            </a:pPr>
+            <a:r>
+              <a:rPr lang="en-IL" sz="2600" dirty="0"/>
+              <a:t>Promotion of the Ecuadorian president and government policies.</a:t>
+            </a:r>
+            <a:endParaRPr lang="en-GB" sz="2600" dirty="0"/>
+          </a:p>
+          <a:p>
+            <a:pPr marL="514350" indent="-514350">
+              <a:buAutoNum type="arabicPeriod"/>
+            </a:pPr>
+            <a:r>
+              <a:rPr lang="en-IL" sz="2600" dirty="0"/>
+              <a:t>Emphasis on social programs, security, democracy, and government achievements.</a:t>
+            </a:r>
+            <a:endParaRPr lang="en-GB" sz="2600" dirty="0"/>
+          </a:p>
+          <a:p>
+            <a:pPr marL="514350" indent="-514350">
+              <a:buAutoNum type="arabicPeriod"/>
+            </a:pPr>
+            <a:r>
+              <a:rPr lang="en-IL" sz="2600" dirty="0"/>
+              <a:t>Reuse of similar supportive language across accounts.</a:t>
+            </a:r>
+            <a:endParaRPr lang="en-GB" sz="2600" dirty="0"/>
+          </a:p>
+          <a:p>
+            <a:pPr marL="514350" indent="-514350">
+              <a:buAutoNum type="arabicPeriod"/>
+            </a:pPr>
+            <a:r>
+              <a:rPr lang="en-IL" sz="2600" dirty="0"/>
+              <a:t>Unusually repetitive references to EU legal and institutional content.</a:t>
+            </a:r>
+            <a:endParaRPr lang="en-GB" sz="2600" dirty="0"/>
+          </a:p>
+          <a:p>
+            <a:pPr marL="514350" indent="-514350">
+              <a:buAutoNum type="arabicPeriod"/>
+            </a:pPr>
+            <a:r>
+              <a:rPr lang="en-IL" sz="2600" b="1" dirty="0"/>
+              <a:t>Shared narratives that may indicate coordinated or automated activity.</a:t>
+            </a:r>
+          </a:p>
+        </p:txBody>
+      </p:sp>
+      <p:sp>
+        <p:nvSpPr>
+          <p:cNvPr id="4" name="Slide Number Placeholder 3">
+            <a:extLst>
+              <a:ext uri="{FF2B5EF4-FFF2-40B4-BE49-F238E27FC236}">
+                <a16:creationId xmlns:a16="http://schemas.microsoft.com/office/drawing/2014/main" id="{1666EB3C-4883-D0C2-5697-AD834591319F}"/>
+              </a:ext>
+            </a:extLst>
+          </p:cNvPr>
+          <p:cNvSpPr>
+            <a:spLocks noGrp="1"/>
+          </p:cNvSpPr>
+          <p:nvPr>
+            <p:ph type="sldNum" sz="quarter" idx="12"/>
+          </p:nvPr>
+        </p:nvSpPr>
+        <p:spPr>
+          <a:xfrm>
+            <a:off x="11728704" y="6464649"/>
+            <a:ext cx="452233" cy="365125"/>
+          </a:xfrm>
+        </p:spPr>
+        <p:txBody>
+          <a:bodyPr anchor="ctr">
+            <a:normAutofit/>
+          </a:bodyPr>
+          <a:lstStyle/>
+          <a:p>
+            <a:pPr>
+              <a:spcAft>
+                <a:spcPts val="600"/>
+              </a:spcAft>
+            </a:pPr>
+            <a:fld id="{E6AB8EDD-9EF2-4633-A1C2-4D908C1019B4}" type="slidenum">
+              <a:rPr lang="he-IL" smtClean="0"/>
+              <a:pPr>
+                <a:spcAft>
+                  <a:spcPts val="600"/>
+                </a:spcAft>
+              </a:pPr>
+              <a:t>22</a:t>
+            </a:fld>
+            <a:endParaRPr lang="he-IL"/>
+          </a:p>
+        </p:txBody>
+      </p:sp>
+    </p:spTree>
+    <p:extLst>
+      <p:ext uri="{BB962C8B-B14F-4D97-AF65-F5344CB8AC3E}">
+        <p14:creationId xmlns:p14="http://schemas.microsoft.com/office/powerpoint/2010/main" val="902338050"/>
+      </p:ext>
+    </p:extLst>
+  </p:cSld>
+  <p:clrMapOvr>
+    <a:masterClrMapping/>
+  </p:clrMapOvr>
+</p:sld>
+</file>
+
+<file path=ppt/slides/slide23.xml><?xml version="1.0" encoding="utf-8"?>
 <p:sld xmlns:a="http://schemas.openxmlformats.org/drawingml/2006/main" xmlns:r="http://schemas.openxmlformats.org/officeDocument/2006/relationships" xmlns:p="http://schemas.openxmlformats.org/presentationml/2006/main">
   <p:cSld>
     <p:spTree>
@@ -12662,7 +14954,7 @@
                   <a:spcPts val="600"/>
                 </a:spcAft>
               </a:pPr>
-              <a:t>14</a:t>
+              <a:t>23</a:t>
             </a:fld>
             <a:endParaRPr lang="he-IL"/>
           </a:p>
@@ -12870,7 +15162,7 @@
 </p:sld>
 </file>
 
-<file path=ppt/slides/slide15.xml><?xml version="1.0" encoding="utf-8"?>
+<file path=ppt/slides/slide24.xml><?xml version="1.0" encoding="utf-8"?>
 <p:sld xmlns:a="http://schemas.openxmlformats.org/drawingml/2006/main" xmlns:r="http://schemas.openxmlformats.org/officeDocument/2006/relationships" xmlns:p="http://schemas.openxmlformats.org/presentationml/2006/main">
   <p:cSld>
     <p:spTree>
@@ -12973,7 +15265,7 @@
                   <a:spcPts val="600"/>
                 </a:spcAft>
               </a:pPr>
-              <a:t>15</a:t>
+              <a:t>24</a:t>
             </a:fld>
             <a:endParaRPr lang="he-IL"/>
           </a:p>
@@ -13245,345 +15537,7 @@
 </p:sld>
 </file>
 
-<file path=ppt/slides/slide16.xml><?xml version="1.0" encoding="utf-8"?>
-<p:sld xmlns:a="http://schemas.openxmlformats.org/drawingml/2006/main" xmlns:r="http://schemas.openxmlformats.org/officeDocument/2006/relationships" xmlns:p="http://schemas.openxmlformats.org/presentationml/2006/main">
-  <p:cSld>
-    <p:spTree>
-      <p:nvGrpSpPr>
-        <p:cNvPr id="1" name="">
-          <a:extLst>
-            <a:ext uri="{FF2B5EF4-FFF2-40B4-BE49-F238E27FC236}">
-              <a16:creationId xmlns:a16="http://schemas.microsoft.com/office/drawing/2014/main" id="{49FBFB06-31E1-F12E-61E2-AD9CFD94A3A2}"/>
-            </a:ext>
-          </a:extLst>
-        </p:cNvPr>
-        <p:cNvGrpSpPr/>
-        <p:nvPr/>
-      </p:nvGrpSpPr>
-      <p:grpSpPr>
-        <a:xfrm>
-          <a:off x="0" y="0"/>
-          <a:ext cx="0" cy="0"/>
-          <a:chOff x="0" y="0"/>
-          <a:chExt cx="0" cy="0"/>
-        </a:xfrm>
-      </p:grpSpPr>
-      <p:pic>
-        <p:nvPicPr>
-          <p:cNvPr id="6" name="Picture 5">
-            <a:extLst>
-              <a:ext uri="{FF2B5EF4-FFF2-40B4-BE49-F238E27FC236}">
-                <a16:creationId xmlns:a16="http://schemas.microsoft.com/office/drawing/2014/main" id="{AF6BC6AE-4687-A2A7-935B-0F2E9F9154B3}"/>
-              </a:ext>
-            </a:extLst>
-          </p:cNvPr>
-          <p:cNvPicPr>
-            <a:picLocks noChangeAspect="1"/>
-          </p:cNvPicPr>
-          <p:nvPr/>
-        </p:nvPicPr>
-        <p:blipFill>
-          <a:blip r:embed="rId2"/>
-          <a:stretch>
-            <a:fillRect/>
-          </a:stretch>
-        </p:blipFill>
-        <p:spPr>
-          <a:xfrm>
-            <a:off x="1440246" y="1580010"/>
-            <a:ext cx="4893567" cy="2297374"/>
-          </a:xfrm>
-          <a:prstGeom prst="rect">
-            <a:avLst/>
-          </a:prstGeom>
-        </p:spPr>
-      </p:pic>
-      <p:pic>
-        <p:nvPicPr>
-          <p:cNvPr id="9" name="Picture 8">
-            <a:extLst>
-              <a:ext uri="{FF2B5EF4-FFF2-40B4-BE49-F238E27FC236}">
-                <a16:creationId xmlns:a16="http://schemas.microsoft.com/office/drawing/2014/main" id="{142AE667-C784-0DA7-5A0E-CB08BA36F635}"/>
-              </a:ext>
-            </a:extLst>
-          </p:cNvPr>
-          <p:cNvPicPr>
-            <a:picLocks noChangeAspect="1"/>
-          </p:cNvPicPr>
-          <p:nvPr/>
-        </p:nvPicPr>
-        <p:blipFill>
-          <a:blip r:embed="rId3"/>
-          <a:stretch>
-            <a:fillRect/>
-          </a:stretch>
-        </p:blipFill>
-        <p:spPr>
-          <a:xfrm>
-            <a:off x="6818609" y="1559914"/>
-            <a:ext cx="4920610" cy="2310068"/>
-          </a:xfrm>
-          <a:prstGeom prst="rect">
-            <a:avLst/>
-          </a:prstGeom>
-        </p:spPr>
-      </p:pic>
-      <p:sp>
-        <p:nvSpPr>
-          <p:cNvPr id="2" name="Title 1">
-            <a:extLst>
-              <a:ext uri="{FF2B5EF4-FFF2-40B4-BE49-F238E27FC236}">
-                <a16:creationId xmlns:a16="http://schemas.microsoft.com/office/drawing/2014/main" id="{41BDCE7F-99C3-9474-F9E6-66CB34E1923E}"/>
-              </a:ext>
-            </a:extLst>
-          </p:cNvPr>
-          <p:cNvSpPr>
-            <a:spLocks noGrp="1"/>
-          </p:cNvSpPr>
-          <p:nvPr>
-            <p:ph type="title"/>
-          </p:nvPr>
-        </p:nvSpPr>
-        <p:spPr/>
-        <p:txBody>
-          <a:bodyPr>
-            <a:normAutofit/>
-          </a:bodyPr>
-          <a:lstStyle/>
-          <a:p>
-            <a:r>
-              <a:rPr lang="en-GB" dirty="0"/>
-              <a:t>Core Number</a:t>
-            </a:r>
-            <a:endParaRPr lang="en-IL" sz="2400" dirty="0"/>
-          </a:p>
-        </p:txBody>
-      </p:sp>
-      <p:sp>
-        <p:nvSpPr>
-          <p:cNvPr id="3" name="Content Placeholder 2">
-            <a:extLst>
-              <a:ext uri="{FF2B5EF4-FFF2-40B4-BE49-F238E27FC236}">
-                <a16:creationId xmlns:a16="http://schemas.microsoft.com/office/drawing/2014/main" id="{D3A2D5A9-A078-1290-ACCC-0C6203E31A92}"/>
-              </a:ext>
-            </a:extLst>
-          </p:cNvPr>
-          <p:cNvSpPr>
-            <a:spLocks noGrp="1"/>
-          </p:cNvSpPr>
-          <p:nvPr>
-            <p:ph idx="1"/>
-          </p:nvPr>
-        </p:nvSpPr>
-        <p:spPr>
-          <a:xfrm>
-            <a:off x="1243086" y="1825624"/>
-            <a:ext cx="10850301" cy="5004149"/>
-          </a:xfrm>
-        </p:spPr>
-        <p:txBody>
-          <a:bodyPr>
-            <a:normAutofit/>
-          </a:bodyPr>
-          <a:lstStyle/>
-          <a:p>
-            <a:pPr marL="0" indent="0">
-              <a:buNone/>
-            </a:pPr>
-            <a:endParaRPr lang="en-GB" sz="2000" b="1" dirty="0"/>
-          </a:p>
-          <a:p>
-            <a:pPr lvl="2"/>
-            <a:endParaRPr lang="en-GB" sz="1500" dirty="0"/>
-          </a:p>
-          <a:p>
-            <a:pPr marL="914400" lvl="2" indent="0">
-              <a:buNone/>
-            </a:pPr>
-            <a:endParaRPr lang="en-GB" sz="1500" dirty="0"/>
-          </a:p>
-        </p:txBody>
-      </p:sp>
-      <p:sp>
-        <p:nvSpPr>
-          <p:cNvPr id="4" name="Slide Number Placeholder 3">
-            <a:extLst>
-              <a:ext uri="{FF2B5EF4-FFF2-40B4-BE49-F238E27FC236}">
-                <a16:creationId xmlns:a16="http://schemas.microsoft.com/office/drawing/2014/main" id="{33A23E22-B25F-6C61-B14B-75EEE667A008}"/>
-              </a:ext>
-            </a:extLst>
-          </p:cNvPr>
-          <p:cNvSpPr>
-            <a:spLocks noGrp="1"/>
-          </p:cNvSpPr>
-          <p:nvPr>
-            <p:ph type="sldNum" sz="quarter" idx="12"/>
-          </p:nvPr>
-        </p:nvSpPr>
-        <p:spPr/>
-        <p:txBody>
-          <a:bodyPr/>
-          <a:lstStyle/>
-          <a:p>
-            <a:fld id="{E6AB8EDD-9EF2-4633-A1C2-4D908C1019B4}" type="slidenum">
-              <a:rPr lang="he-IL" smtClean="0"/>
-              <a:t>16</a:t>
-            </a:fld>
-            <a:endParaRPr lang="he-IL"/>
-          </a:p>
-        </p:txBody>
-      </p:sp>
-      <p:sp>
-        <p:nvSpPr>
-          <p:cNvPr id="5" name="TextBox 4">
-            <a:extLst>
-              <a:ext uri="{FF2B5EF4-FFF2-40B4-BE49-F238E27FC236}">
-                <a16:creationId xmlns:a16="http://schemas.microsoft.com/office/drawing/2014/main" id="{F1D85B4F-AF7F-749F-77C1-315E6E06566E}"/>
-              </a:ext>
-            </a:extLst>
-          </p:cNvPr>
-          <p:cNvSpPr txBox="1"/>
-          <p:nvPr/>
-        </p:nvSpPr>
-        <p:spPr>
-          <a:xfrm>
-            <a:off x="6659873" y="1186618"/>
-            <a:ext cx="2214283" cy="369332"/>
-          </a:xfrm>
-          <a:prstGeom prst="rect">
-            <a:avLst/>
-          </a:prstGeom>
-          <a:noFill/>
-        </p:spPr>
-        <p:txBody>
-          <a:bodyPr wrap="square" rtlCol="0">
-            <a:spAutoFit/>
-          </a:bodyPr>
-          <a:lstStyle/>
-          <a:p>
-            <a:pPr algn="ctr"/>
-            <a:r>
-              <a:rPr lang="en-US" dirty="0"/>
-              <a:t>Ecuador </a:t>
-            </a:r>
-            <a:r>
-              <a:rPr lang="en-GB" dirty="0"/>
-              <a:t>Campaign</a:t>
-            </a:r>
-            <a:endParaRPr lang="en-IL" dirty="0"/>
-          </a:p>
-        </p:txBody>
-      </p:sp>
-      <p:sp>
-        <p:nvSpPr>
-          <p:cNvPr id="10" name="TextBox 9">
-            <a:extLst>
-              <a:ext uri="{FF2B5EF4-FFF2-40B4-BE49-F238E27FC236}">
-                <a16:creationId xmlns:a16="http://schemas.microsoft.com/office/drawing/2014/main" id="{403E0586-5C53-F6ED-1E5A-96C49F4642C9}"/>
-              </a:ext>
-            </a:extLst>
-          </p:cNvPr>
-          <p:cNvSpPr txBox="1"/>
-          <p:nvPr/>
-        </p:nvSpPr>
-        <p:spPr>
-          <a:xfrm>
-            <a:off x="1440246" y="6223634"/>
-            <a:ext cx="6923825" cy="646331"/>
-          </a:xfrm>
-          <a:prstGeom prst="rect">
-            <a:avLst/>
-          </a:prstGeom>
-          <a:noFill/>
-        </p:spPr>
-        <p:txBody>
-          <a:bodyPr wrap="square" rtlCol="0">
-            <a:spAutoFit/>
-          </a:bodyPr>
-          <a:lstStyle/>
-          <a:p>
-            <a:r>
-              <a:rPr lang="en-GB" b="1" dirty="0"/>
-              <a:t>Cumulative distribution: proportion of IO drivers by Core Number threshold (≤ / ≥)</a:t>
-            </a:r>
-            <a:endParaRPr lang="en-IL" b="1" dirty="0"/>
-          </a:p>
-        </p:txBody>
-      </p:sp>
-      <p:pic>
-        <p:nvPicPr>
-          <p:cNvPr id="12" name="Picture 11">
-            <a:extLst>
-              <a:ext uri="{FF2B5EF4-FFF2-40B4-BE49-F238E27FC236}">
-                <a16:creationId xmlns:a16="http://schemas.microsoft.com/office/drawing/2014/main" id="{ED8B88D7-4ED4-985E-8371-C40F0673F867}"/>
-              </a:ext>
-            </a:extLst>
-          </p:cNvPr>
-          <p:cNvPicPr>
-            <a:picLocks noChangeAspect="1"/>
-          </p:cNvPicPr>
-          <p:nvPr/>
-        </p:nvPicPr>
-        <p:blipFill>
-          <a:blip r:embed="rId4"/>
-          <a:stretch>
-            <a:fillRect/>
-          </a:stretch>
-        </p:blipFill>
-        <p:spPr>
-          <a:xfrm>
-            <a:off x="1543939" y="3917576"/>
-            <a:ext cx="4893567" cy="2252632"/>
-          </a:xfrm>
-          <a:prstGeom prst="rect">
-            <a:avLst/>
-          </a:prstGeom>
-        </p:spPr>
-      </p:pic>
-      <p:pic>
-        <p:nvPicPr>
-          <p:cNvPr id="13" name="Picture 12">
-            <a:extLst>
-              <a:ext uri="{FF2B5EF4-FFF2-40B4-BE49-F238E27FC236}">
-                <a16:creationId xmlns:a16="http://schemas.microsoft.com/office/drawing/2014/main" id="{CEFBE902-A18C-18D2-66ED-BC4E7994D22D}"/>
-              </a:ext>
-            </a:extLst>
-          </p:cNvPr>
-          <p:cNvPicPr>
-            <a:picLocks noChangeAspect="1"/>
-          </p:cNvPicPr>
-          <p:nvPr/>
-        </p:nvPicPr>
-        <p:blipFill>
-          <a:blip r:embed="rId5"/>
-          <a:stretch>
-            <a:fillRect/>
-          </a:stretch>
-        </p:blipFill>
-        <p:spPr>
-          <a:xfrm>
-            <a:off x="6846984" y="3953617"/>
-            <a:ext cx="4863860" cy="2323694"/>
-          </a:xfrm>
-          <a:prstGeom prst="rect">
-            <a:avLst/>
-          </a:prstGeom>
-        </p:spPr>
-      </p:pic>
-    </p:spTree>
-    <p:extLst>
-      <p:ext uri="{BB962C8B-B14F-4D97-AF65-F5344CB8AC3E}">
-        <p14:creationId xmlns:p14="http://schemas.microsoft.com/office/powerpoint/2010/main" val="3856546097"/>
-      </p:ext>
-    </p:extLst>
-  </p:cSld>
-  <p:clrMapOvr>
-    <a:masterClrMapping/>
-  </p:clrMapOvr>
-</p:sld>
-</file>
-
-<file path=ppt/slides/slide17.xml><?xml version="1.0" encoding="utf-8"?>
+<file path=ppt/slides/slide25.xml><?xml version="1.0" encoding="utf-8"?>
 <p:sld xmlns:a="http://schemas.openxmlformats.org/drawingml/2006/main" xmlns:r="http://schemas.openxmlformats.org/officeDocument/2006/relationships" xmlns:p="http://schemas.openxmlformats.org/presentationml/2006/main">
   <p:cSld>
     <p:spTree>
@@ -13730,7 +15684,7 @@
           <a:p>
             <a:fld id="{E6AB8EDD-9EF2-4633-A1C2-4D908C1019B4}" type="slidenum">
               <a:rPr lang="he-IL" smtClean="0"/>
-              <a:t>17</a:t>
+              <a:t>25</a:t>
             </a:fld>
             <a:endParaRPr lang="he-IL"/>
           </a:p>
@@ -13860,234 +15814,6 @@
     <p:extLst>
       <p:ext uri="{BB962C8B-B14F-4D97-AF65-F5344CB8AC3E}">
         <p14:creationId xmlns:p14="http://schemas.microsoft.com/office/powerpoint/2010/main" val="693242275"/>
-      </p:ext>
-    </p:extLst>
-  </p:cSld>
-  <p:clrMapOvr>
-    <a:masterClrMapping/>
-  </p:clrMapOvr>
-</p:sld>
-</file>
-
-<file path=ppt/slides/slide2.xml><?xml version="1.0" encoding="utf-8"?>
-<p:sld xmlns:a="http://schemas.openxmlformats.org/drawingml/2006/main" xmlns:r="http://schemas.openxmlformats.org/officeDocument/2006/relationships" xmlns:p="http://schemas.openxmlformats.org/presentationml/2006/main">
-  <p:cSld>
-    <p:spTree>
-      <p:nvGrpSpPr>
-        <p:cNvPr id="1" name="">
-          <a:extLst>
-            <a:ext uri="{FF2B5EF4-FFF2-40B4-BE49-F238E27FC236}">
-              <a16:creationId xmlns:a16="http://schemas.microsoft.com/office/drawing/2014/main" id="{21B25F04-2075-5640-5DEC-3A750362777B}"/>
-            </a:ext>
-          </a:extLst>
-        </p:cNvPr>
-        <p:cNvGrpSpPr/>
-        <p:nvPr/>
-      </p:nvGrpSpPr>
-      <p:grpSpPr>
-        <a:xfrm>
-          <a:off x="0" y="0"/>
-          <a:ext cx="0" cy="0"/>
-          <a:chOff x="0" y="0"/>
-          <a:chExt cx="0" cy="0"/>
-        </a:xfrm>
-      </p:grpSpPr>
-      <p:sp>
-        <p:nvSpPr>
-          <p:cNvPr id="2" name="Title 1">
-            <a:extLst>
-              <a:ext uri="{FF2B5EF4-FFF2-40B4-BE49-F238E27FC236}">
-                <a16:creationId xmlns:a16="http://schemas.microsoft.com/office/drawing/2014/main" id="{754707E5-B275-6452-62FB-2B98BD269FB1}"/>
-              </a:ext>
-            </a:extLst>
-          </p:cNvPr>
-          <p:cNvSpPr>
-            <a:spLocks noGrp="1"/>
-          </p:cNvSpPr>
-          <p:nvPr>
-            <p:ph type="title"/>
-          </p:nvPr>
-        </p:nvSpPr>
-        <p:spPr>
-          <a:xfrm>
-            <a:off x="3072268" y="401637"/>
-            <a:ext cx="8753475" cy="1325563"/>
-          </a:xfrm>
-        </p:spPr>
-        <p:txBody>
-          <a:bodyPr anchor="ctr">
-            <a:normAutofit/>
-          </a:bodyPr>
-          <a:lstStyle/>
-          <a:p>
-            <a:r>
-              <a:rPr lang="en-IL" dirty="0"/>
-              <a:t>Motivation</a:t>
-            </a:r>
-          </a:p>
-        </p:txBody>
-      </p:sp>
-      <p:sp>
-        <p:nvSpPr>
-          <p:cNvPr id="3" name="Content Placeholder 2">
-            <a:extLst>
-              <a:ext uri="{FF2B5EF4-FFF2-40B4-BE49-F238E27FC236}">
-                <a16:creationId xmlns:a16="http://schemas.microsoft.com/office/drawing/2014/main" id="{DFC11588-A0A9-88D4-64DC-E215A71D589A}"/>
-              </a:ext>
-            </a:extLst>
-          </p:cNvPr>
-          <p:cNvSpPr>
-            <a:spLocks noGrp="1"/>
-          </p:cNvSpPr>
-          <p:nvPr>
-            <p:ph sz="half" idx="1"/>
-          </p:nvPr>
-        </p:nvSpPr>
-        <p:spPr>
-          <a:xfrm>
-            <a:off x="1236990" y="1821101"/>
-            <a:ext cx="5631057" cy="4749032"/>
-          </a:xfrm>
-        </p:spPr>
-        <p:txBody>
-          <a:bodyPr>
-            <a:noAutofit/>
-          </a:bodyPr>
-          <a:lstStyle/>
-          <a:p>
-            <a:r>
-              <a:rPr lang="en-IL" sz="3000" dirty="0"/>
-              <a:t>Social media platforms have become central spaces for public discourse</a:t>
-            </a:r>
-            <a:r>
-              <a:rPr lang="en-US" sz="3000" dirty="0"/>
-              <a:t>.</a:t>
-            </a:r>
-            <a:endParaRPr lang="en-IL" sz="3000" dirty="0"/>
-          </a:p>
-          <a:p>
-            <a:r>
-              <a:rPr lang="en-US" sz="3000" dirty="0"/>
-              <a:t>The </a:t>
-            </a:r>
-            <a:r>
-              <a:rPr lang="en-IL" sz="3000" dirty="0"/>
-              <a:t>platforms</a:t>
-            </a:r>
-            <a:r>
-              <a:rPr lang="en-US" sz="3000" dirty="0"/>
-              <a:t>’</a:t>
-            </a:r>
-            <a:r>
-              <a:rPr lang="en-IL" sz="3000" dirty="0"/>
-              <a:t> openness also enables malicious actors</a:t>
-            </a:r>
-            <a:r>
-              <a:rPr lang="en-US" sz="3000" dirty="0"/>
-              <a:t> </a:t>
-            </a:r>
-            <a:r>
-              <a:rPr lang="en-IL" sz="3000" dirty="0"/>
-              <a:t>to manipulate online conversations.</a:t>
-            </a:r>
-          </a:p>
-          <a:p>
-            <a:r>
-              <a:rPr lang="en-IL" sz="3000" dirty="0"/>
-              <a:t>These </a:t>
-            </a:r>
-            <a:r>
-              <a:rPr lang="en-GB" sz="3000" dirty="0"/>
-              <a:t>information operations (IO)</a:t>
-            </a:r>
-            <a:r>
-              <a:rPr lang="en-IL" sz="3000" dirty="0"/>
-              <a:t> threaten democratic processes, public trust, and societal cohesion.</a:t>
-            </a:r>
-          </a:p>
-        </p:txBody>
-      </p:sp>
-      <p:pic>
-        <p:nvPicPr>
-          <p:cNvPr id="8" name="Picture 7">
-            <a:extLst>
-              <a:ext uri="{FF2B5EF4-FFF2-40B4-BE49-F238E27FC236}">
-                <a16:creationId xmlns:a16="http://schemas.microsoft.com/office/drawing/2014/main" id="{4D1C13A7-1923-2D9F-B551-824B61A989A1}"/>
-              </a:ext>
-            </a:extLst>
-          </p:cNvPr>
-          <p:cNvPicPr>
-            <a:picLocks noChangeAspect="1"/>
-          </p:cNvPicPr>
-          <p:nvPr/>
-        </p:nvPicPr>
-        <p:blipFill>
-          <a:blip r:embed="rId2"/>
-          <a:stretch>
-            <a:fillRect/>
-          </a:stretch>
-        </p:blipFill>
-        <p:spPr>
-          <a:xfrm>
-            <a:off x="6868047" y="1546559"/>
-            <a:ext cx="5181600" cy="3925062"/>
-          </a:xfrm>
-          <a:prstGeom prst="rect">
-            <a:avLst/>
-          </a:prstGeom>
-          <a:noFill/>
-        </p:spPr>
-      </p:pic>
-      <p:sp>
-        <p:nvSpPr>
-          <p:cNvPr id="4" name="Slide Number Placeholder 3">
-            <a:extLst>
-              <a:ext uri="{FF2B5EF4-FFF2-40B4-BE49-F238E27FC236}">
-                <a16:creationId xmlns:a16="http://schemas.microsoft.com/office/drawing/2014/main" id="{C0B5F257-DB4A-FAD3-2097-E17D9C5B1528}"/>
-              </a:ext>
-            </a:extLst>
-          </p:cNvPr>
-          <p:cNvSpPr>
-            <a:spLocks noGrp="1"/>
-          </p:cNvSpPr>
-          <p:nvPr>
-            <p:ph type="sldNum" sz="quarter" idx="12"/>
-          </p:nvPr>
-        </p:nvSpPr>
-        <p:spPr>
-          <a:xfrm>
-            <a:off x="11728704" y="6464649"/>
-            <a:ext cx="452233" cy="365125"/>
-          </a:xfrm>
-        </p:spPr>
-        <p:txBody>
-          <a:bodyPr anchor="ctr">
-            <a:normAutofit/>
-          </a:bodyPr>
-          <a:lstStyle/>
-          <a:p>
-            <a:pPr>
-              <a:spcAft>
-                <a:spcPts val="600"/>
-              </a:spcAft>
-            </a:pPr>
-            <a:fld id="{E6AB8EDD-9EF2-4633-A1C2-4D908C1019B4}" type="slidenum">
-              <a:rPr lang="he-IL" smtClean="0"/>
-              <a:pPr>
-                <a:spcAft>
-                  <a:spcPts val="600"/>
-                </a:spcAft>
-              </a:pPr>
-              <a:t>2</a:t>
-            </a:fld>
-            <a:endParaRPr lang="he-IL"/>
-          </a:p>
-        </p:txBody>
-      </p:sp>
-    </p:spTree>
-    <p:extLst>
-      <p:ext uri="{BB962C8B-B14F-4D97-AF65-F5344CB8AC3E}">
-        <p14:creationId xmlns:p14="http://schemas.microsoft.com/office/powerpoint/2010/main" val="3988943813"/>
       </p:ext>
     </p:extLst>
   </p:cSld>
@@ -14190,7 +15916,23 @@
           <a:p>
             <a:r>
               <a:rPr lang="en-IL" sz="3200" dirty="0"/>
-              <a:t>IO campaigns rely on groups of accounts acting together.</a:t>
+              <a:t>IO</a:t>
+            </a:r>
+            <a:r>
+              <a:rPr lang="en-GB" sz="3200" dirty="0"/>
+              <a:t>’s</a:t>
+            </a:r>
+            <a:r>
+              <a:rPr lang="en-IL" sz="3200" dirty="0"/>
+              <a:t> rely on groups of accounts acting together</a:t>
+            </a:r>
+            <a:r>
+              <a:rPr lang="en-GB" sz="3200" dirty="0"/>
+              <a:t> in coordination</a:t>
+            </a:r>
+            <a:r>
+              <a:rPr lang="en-IL" sz="3200" dirty="0"/>
+              <a:t>.</a:t>
             </a:r>
           </a:p>
           <a:p>
@@ -14866,7 +16608,7 @@
           <a:p>
             <a:r>
               <a:rPr lang="en-GB" dirty="0"/>
-              <a:t>Co-Actions Graph </a:t>
+              <a:t>Methods - Co-Actions Graph </a:t>
             </a:r>
             <a:endParaRPr lang="en-IL" dirty="0"/>
           </a:p>
